--- a/assets/shorts.pptx
+++ b/assets/shorts.pptx
@@ -5,7 +5,7 @@
     <p:sldMasterId id="2147483732" r:id="rId1"/>
   </p:sldMasterIdLst>
   <p:notesMasterIdLst>
-    <p:notesMasterId r:id="rId37"/>
+    <p:notesMasterId r:id="rId38"/>
   </p:notesMasterIdLst>
   <p:sldIdLst>
     <p:sldId id="263" r:id="rId2"/>
@@ -30,19 +30,20 @@
     <p:sldId id="293" r:id="rId21"/>
     <p:sldId id="294" r:id="rId22"/>
     <p:sldId id="306" r:id="rId23"/>
-    <p:sldId id="296" r:id="rId24"/>
-    <p:sldId id="297" r:id="rId25"/>
-    <p:sldId id="298" r:id="rId26"/>
-    <p:sldId id="299" r:id="rId27"/>
-    <p:sldId id="300" r:id="rId28"/>
-    <p:sldId id="301" r:id="rId29"/>
-    <p:sldId id="302" r:id="rId30"/>
-    <p:sldId id="303" r:id="rId31"/>
-    <p:sldId id="304" r:id="rId32"/>
-    <p:sldId id="305" r:id="rId33"/>
-    <p:sldId id="307" r:id="rId34"/>
-    <p:sldId id="308" r:id="rId35"/>
-    <p:sldId id="282" r:id="rId36"/>
+    <p:sldId id="309" r:id="rId24"/>
+    <p:sldId id="296" r:id="rId25"/>
+    <p:sldId id="297" r:id="rId26"/>
+    <p:sldId id="298" r:id="rId27"/>
+    <p:sldId id="299" r:id="rId28"/>
+    <p:sldId id="300" r:id="rId29"/>
+    <p:sldId id="301" r:id="rId30"/>
+    <p:sldId id="302" r:id="rId31"/>
+    <p:sldId id="303" r:id="rId32"/>
+    <p:sldId id="304" r:id="rId33"/>
+    <p:sldId id="305" r:id="rId34"/>
+    <p:sldId id="307" r:id="rId35"/>
+    <p:sldId id="308" r:id="rId36"/>
+    <p:sldId id="282" r:id="rId37"/>
   </p:sldIdLst>
   <p:sldSz cx="10285413" cy="18288000"/>
   <p:notesSz cx="6858000" cy="9144000"/>
@@ -12837,6 +12838,358 @@
   <p:cSld>
     <p:bg>
       <p:bgPr>
+        <a:blipFill>
+          <a:blip r:embed="rId2"/>
+          <a:tile tx="0" ty="0" sx="100000" sy="100000" flip="none" algn="tl"/>
+        </a:blipFill>
+        <a:effectLst/>
+      </p:bgPr>
+    </p:bg>
+    <p:spTree>
+      <p:nvGrpSpPr>
+        <p:cNvPr id="1" name="">
+          <a:extLst>
+            <a:ext uri="{FF2B5EF4-FFF2-40B4-BE49-F238E27FC236}">
+              <a16:creationId xmlns:a16="http://schemas.microsoft.com/office/drawing/2014/main" id="{67B18B78-91D1-FDA0-9CF6-48E4AC8F0038}"/>
+            </a:ext>
+          </a:extLst>
+        </p:cNvPr>
+        <p:cNvGrpSpPr/>
+        <p:nvPr/>
+      </p:nvGrpSpPr>
+      <p:grpSpPr>
+        <a:xfrm>
+          <a:off x="0" y="0"/>
+          <a:ext cx="0" cy="0"/>
+          <a:chOff x="0" y="0"/>
+          <a:chExt cx="0" cy="0"/>
+        </a:xfrm>
+      </p:grpSpPr>
+      <p:sp>
+        <p:nvSpPr>
+          <p:cNvPr id="4" name="TextBox 3">
+            <a:extLst>
+              <a:ext uri="{FF2B5EF4-FFF2-40B4-BE49-F238E27FC236}">
+                <a16:creationId xmlns:a16="http://schemas.microsoft.com/office/drawing/2014/main" id="{7E0ED6F7-32C9-2B97-4246-A7573BB5663E}"/>
+              </a:ext>
+            </a:extLst>
+          </p:cNvPr>
+          <p:cNvSpPr txBox="1"/>
+          <p:nvPr/>
+        </p:nvSpPr>
+        <p:spPr>
+          <a:xfrm>
+            <a:off x="223306" y="4733191"/>
+            <a:ext cx="9838800" cy="1189726"/>
+          </a:xfrm>
+          <a:prstGeom prst="rect">
+            <a:avLst/>
+          </a:prstGeom>
+          <a:gradFill flip="none" rotWithShape="1">
+            <a:gsLst>
+              <a:gs pos="0">
+                <a:schemeClr val="accent2">
+                  <a:lumMod val="67000"/>
+                </a:schemeClr>
+              </a:gs>
+              <a:gs pos="48000">
+                <a:schemeClr val="accent2">
+                  <a:lumMod val="97000"/>
+                  <a:lumOff val="3000"/>
+                </a:schemeClr>
+              </a:gs>
+              <a:gs pos="100000">
+                <a:schemeClr val="accent2">
+                  <a:lumMod val="60000"/>
+                  <a:lumOff val="40000"/>
+                </a:schemeClr>
+              </a:gs>
+            </a:gsLst>
+            <a:lin ang="16200000" scaled="1"/>
+            <a:tileRect/>
+          </a:gradFill>
+          <a:ln>
+            <a:noFill/>
+          </a:ln>
+        </p:spPr>
+        <p:style>
+          <a:lnRef idx="0">
+            <a:scrgbClr r="0" g="0" b="0"/>
+          </a:lnRef>
+          <a:fillRef idx="0">
+            <a:scrgbClr r="0" g="0" b="0"/>
+          </a:fillRef>
+          <a:effectRef idx="0">
+            <a:scrgbClr r="0" g="0" b="0"/>
+          </a:effectRef>
+          <a:fontRef idx="minor">
+            <a:schemeClr val="lt1"/>
+          </a:fontRef>
+        </p:style>
+        <p:txBody>
+          <a:bodyPr wrap="square" rtlCol="0">
+            <a:noAutofit/>
+          </a:bodyPr>
+          <a:lstStyle/>
+          <a:p>
+            <a:pPr marL="0" algn="ctr" defTabSz="457200" rtl="0" eaLnBrk="1" latinLnBrk="0" hangingPunct="1"/>
+            <a:r>
+              <a:rPr lang="en-US" sz="6000" b="1" dirty="0" err="1">
+                <a:ln w="0"/>
+                <a:solidFill>
+                  <a:schemeClr val="tx1"/>
+                </a:solidFill>
+                <a:effectLst>
+                  <a:outerShdw blurRad="38100" dist="19050" dir="2700000" algn="tl" rotWithShape="0">
+                    <a:schemeClr val="dk1">
+                      <a:alpha val="40000"/>
+                    </a:schemeClr>
+                  </a:outerShdw>
+                </a:effectLst>
+                <a:latin typeface="+mj-lt"/>
+              </a:rPr>
+              <a:t>dataclass</a:t>
+            </a:r>
+            <a:endParaRPr lang="en-GB" sz="1600" b="1" dirty="0">
+              <a:ln w="0"/>
+              <a:solidFill>
+                <a:schemeClr val="tx1"/>
+              </a:solidFill>
+              <a:effectLst>
+                <a:outerShdw blurRad="38100" dist="19050" dir="2700000" algn="tl" rotWithShape="0">
+                  <a:schemeClr val="dk1">
+                    <a:alpha val="40000"/>
+                  </a:schemeClr>
+                </a:outerShdw>
+              </a:effectLst>
+              <a:latin typeface="+mj-lt"/>
+            </a:endParaRPr>
+          </a:p>
+        </p:txBody>
+      </p:sp>
+      <p:pic>
+        <p:nvPicPr>
+          <p:cNvPr id="5" name="Picture 4">
+            <a:extLst>
+              <a:ext uri="{FF2B5EF4-FFF2-40B4-BE49-F238E27FC236}">
+                <a16:creationId xmlns:a16="http://schemas.microsoft.com/office/drawing/2014/main" id="{BF001C73-DF35-30E5-356C-0F186FB087E7}"/>
+              </a:ext>
+            </a:extLst>
+          </p:cNvPr>
+          <p:cNvPicPr>
+            <a:picLocks noChangeAspect="1"/>
+          </p:cNvPicPr>
+          <p:nvPr/>
+        </p:nvPicPr>
+        <p:blipFill>
+          <a:blip r:embed="rId3"/>
+          <a:stretch>
+            <a:fillRect/>
+          </a:stretch>
+        </p:blipFill>
+        <p:spPr>
+          <a:xfrm>
+            <a:off x="290127" y="4814930"/>
+            <a:ext cx="1063167" cy="1063167"/>
+          </a:xfrm>
+          <a:prstGeom prst="rect">
+            <a:avLst/>
+          </a:prstGeom>
+        </p:spPr>
+      </p:pic>
+      <p:sp>
+        <p:nvSpPr>
+          <p:cNvPr id="13" name="TextBox 12">
+            <a:extLst>
+              <a:ext uri="{FF2B5EF4-FFF2-40B4-BE49-F238E27FC236}">
+                <a16:creationId xmlns:a16="http://schemas.microsoft.com/office/drawing/2014/main" id="{96F47210-119F-954D-1993-4CF2A6779D96}"/>
+              </a:ext>
+            </a:extLst>
+          </p:cNvPr>
+          <p:cNvSpPr txBox="1"/>
+          <p:nvPr/>
+        </p:nvSpPr>
+        <p:spPr>
+          <a:xfrm>
+            <a:off x="318575" y="11866316"/>
+            <a:ext cx="9648263" cy="1938992"/>
+          </a:xfrm>
+          <a:prstGeom prst="rect">
+            <a:avLst/>
+          </a:prstGeom>
+          <a:noFill/>
+        </p:spPr>
+        <p:txBody>
+          <a:bodyPr wrap="square" rtlCol="0">
+            <a:spAutoFit/>
+          </a:bodyPr>
+          <a:lstStyle/>
+          <a:p>
+            <a:pPr algn="ctr"/>
+            <a:r>
+              <a:rPr lang="en-GB" sz="6000" dirty="0">
+                <a:ln w="0"/>
+                <a:effectLst>
+                  <a:outerShdw blurRad="38100" dist="19050" dir="2700000" algn="tl" rotWithShape="0">
+                    <a:schemeClr val="dk1">
+                      <a:alpha val="40000"/>
+                    </a:schemeClr>
+                  </a:outerShdw>
+                </a:effectLst>
+                <a:latin typeface="Patrick Hand" pitchFamily="2" charset="77"/>
+              </a:rPr>
+              <a:t>Using </a:t>
+            </a:r>
+            <a:r>
+              <a:rPr lang="en-GB" sz="6000" dirty="0" err="1">
+                <a:ln w="0"/>
+                <a:effectLst>
+                  <a:outerShdw blurRad="38100" dist="19050" dir="2700000" algn="tl" rotWithShape="0">
+                    <a:schemeClr val="dk1">
+                      <a:alpha val="40000"/>
+                    </a:schemeClr>
+                  </a:outerShdw>
+                </a:effectLst>
+                <a:latin typeface="Patrick Hand" pitchFamily="2" charset="77"/>
+              </a:rPr>
+              <a:t>dataclass</a:t>
+            </a:r>
+            <a:r>
+              <a:rPr lang="en-GB" sz="6000" dirty="0">
+                <a:ln w="0"/>
+                <a:effectLst>
+                  <a:outerShdw blurRad="38100" dist="19050" dir="2700000" algn="tl" rotWithShape="0">
+                    <a:schemeClr val="dk1">
+                      <a:alpha val="40000"/>
+                    </a:schemeClr>
+                  </a:outerShdw>
+                </a:effectLst>
+                <a:latin typeface="Patrick Hand" pitchFamily="2" charset="77"/>
+              </a:rPr>
+              <a:t> to manage structured data</a:t>
+            </a:r>
+            <a:endParaRPr lang="en-DE" sz="6000" dirty="0">
+              <a:ln w="0"/>
+              <a:effectLst>
+                <a:outerShdw blurRad="38100" dist="19050" dir="2700000" algn="tl" rotWithShape="0">
+                  <a:schemeClr val="dk1">
+                    <a:alpha val="40000"/>
+                  </a:schemeClr>
+                </a:outerShdw>
+              </a:effectLst>
+              <a:latin typeface="Patrick Hand" pitchFamily="2" charset="77"/>
+            </a:endParaRPr>
+          </a:p>
+        </p:txBody>
+      </p:sp>
+      <p:sp>
+        <p:nvSpPr>
+          <p:cNvPr id="25" name="TextBox 24">
+            <a:extLst>
+              <a:ext uri="{FF2B5EF4-FFF2-40B4-BE49-F238E27FC236}">
+                <a16:creationId xmlns:a16="http://schemas.microsoft.com/office/drawing/2014/main" id="{F92902BB-65E3-7B86-4B2A-65C9554F2171}"/>
+              </a:ext>
+            </a:extLst>
+          </p:cNvPr>
+          <p:cNvSpPr txBox="1"/>
+          <p:nvPr/>
+        </p:nvSpPr>
+        <p:spPr>
+          <a:xfrm>
+            <a:off x="-8470937" y="2490606"/>
+            <a:ext cx="5705408" cy="830997"/>
+          </a:xfrm>
+          <a:prstGeom prst="rect">
+            <a:avLst/>
+          </a:prstGeom>
+        </p:spPr>
+        <p:style>
+          <a:lnRef idx="1">
+            <a:schemeClr val="accent2"/>
+          </a:lnRef>
+          <a:fillRef idx="2">
+            <a:schemeClr val="accent2"/>
+          </a:fillRef>
+          <a:effectRef idx="1">
+            <a:schemeClr val="accent2"/>
+          </a:effectRef>
+          <a:fontRef idx="minor">
+            <a:schemeClr val="dk1"/>
+          </a:fontRef>
+        </p:style>
+        <p:txBody>
+          <a:bodyPr wrap="none" rtlCol="0">
+            <a:spAutoFit/>
+          </a:bodyPr>
+          <a:lstStyle/>
+          <a:p>
+            <a:r>
+              <a:rPr lang="en-US" sz="4800" dirty="0">
+                <a:solidFill>
+                  <a:srgbClr val="FF0000"/>
+                </a:solidFill>
+                <a:latin typeface="Patrick Hand" pitchFamily="2" charset="77"/>
+              </a:rPr>
+              <a:t>Image:py_001_dataclass</a:t>
+            </a:r>
+            <a:endParaRPr lang="en-DE" sz="4800" dirty="0">
+              <a:solidFill>
+                <a:srgbClr val="FF0000"/>
+              </a:solidFill>
+              <a:latin typeface="Patrick Hand" pitchFamily="2" charset="77"/>
+            </a:endParaRPr>
+          </a:p>
+        </p:txBody>
+      </p:sp>
+      <p:pic>
+        <p:nvPicPr>
+          <p:cNvPr id="2" name="Picture 1">
+            <a:extLst>
+              <a:ext uri="{FF2B5EF4-FFF2-40B4-BE49-F238E27FC236}">
+                <a16:creationId xmlns:a16="http://schemas.microsoft.com/office/drawing/2014/main" id="{8111D9AD-7775-54B2-F290-E96C7CE6222A}"/>
+              </a:ext>
+            </a:extLst>
+          </p:cNvPr>
+          <p:cNvPicPr>
+            <a:picLocks noChangeAspect="1"/>
+          </p:cNvPicPr>
+          <p:nvPr/>
+        </p:nvPicPr>
+        <p:blipFill rotWithShape="1">
+          <a:blip r:embed="rId4"/>
+          <a:srcRect l="17537" t="25603" r="12337" b="16319"/>
+          <a:stretch>
+            <a:fillRect/>
+          </a:stretch>
+        </p:blipFill>
+        <p:spPr>
+          <a:xfrm>
+            <a:off x="223306" y="6068289"/>
+            <a:ext cx="9838800" cy="5651261"/>
+          </a:xfrm>
+          <a:prstGeom prst="rect">
+            <a:avLst/>
+          </a:prstGeom>
+        </p:spPr>
+      </p:pic>
+    </p:spTree>
+    <p:extLst>
+      <p:ext uri="{BB962C8B-B14F-4D97-AF65-F5344CB8AC3E}">
+        <p14:creationId xmlns:p14="http://schemas.microsoft.com/office/powerpoint/2010/main" val="688552790"/>
+      </p:ext>
+    </p:extLst>
+  </p:cSld>
+  <p:clrMapOvr>
+    <a:masterClrMapping/>
+  </p:clrMapOvr>
+</p:sld>
+</file>
+
+<file path=ppt/slides/slide24.xml><?xml version="1.0" encoding="utf-8"?>
+<p:sld xmlns:a="http://schemas.openxmlformats.org/drawingml/2006/main" xmlns:r="http://schemas.openxmlformats.org/officeDocument/2006/relationships" xmlns:p="http://schemas.openxmlformats.org/presentationml/2006/main">
+  <p:cSld>
+    <p:bg>
+      <p:bgPr>
         <a:gradFill flip="none" rotWithShape="1">
           <a:gsLst>
             <a:gs pos="0">
@@ -13363,7 +13716,7 @@
 </p:sld>
 </file>
 
-<file path=ppt/slides/slide24.xml><?xml version="1.0" encoding="utf-8"?>
+<file path=ppt/slides/slide25.xml><?xml version="1.0" encoding="utf-8"?>
 <p:sld xmlns:a="http://schemas.openxmlformats.org/drawingml/2006/main" xmlns:r="http://schemas.openxmlformats.org/officeDocument/2006/relationships" xmlns:p="http://schemas.openxmlformats.org/presentationml/2006/main">
   <p:cSld>
     <p:bg>
@@ -13868,7 +14221,7 @@
 </p:sld>
 </file>
 
-<file path=ppt/slides/slide25.xml><?xml version="1.0" encoding="utf-8"?>
+<file path=ppt/slides/slide26.xml><?xml version="1.0" encoding="utf-8"?>
 <p:sld xmlns:a="http://schemas.openxmlformats.org/drawingml/2006/main" xmlns:r="http://schemas.openxmlformats.org/officeDocument/2006/relationships" xmlns:p="http://schemas.openxmlformats.org/presentationml/2006/main">
   <p:cSld>
     <p:bg>
@@ -14323,7 +14676,7 @@
 </p:sld>
 </file>
 
-<file path=ppt/slides/slide26.xml><?xml version="1.0" encoding="utf-8"?>
+<file path=ppt/slides/slide27.xml><?xml version="1.0" encoding="utf-8"?>
 <p:sld xmlns:a="http://schemas.openxmlformats.org/drawingml/2006/main" xmlns:r="http://schemas.openxmlformats.org/officeDocument/2006/relationships" xmlns:p="http://schemas.openxmlformats.org/presentationml/2006/main">
   <p:cSld>
     <p:bg>
@@ -14661,7 +15014,7 @@
 </p:sld>
 </file>
 
-<file path=ppt/slides/slide27.xml><?xml version="1.0" encoding="utf-8"?>
+<file path=ppt/slides/slide28.xml><?xml version="1.0" encoding="utf-8"?>
 <p:sld xmlns:a="http://schemas.openxmlformats.org/drawingml/2006/main" xmlns:r="http://schemas.openxmlformats.org/officeDocument/2006/relationships" xmlns:p="http://schemas.openxmlformats.org/presentationml/2006/main">
   <p:cSld>
     <p:bg>
@@ -15041,7 +15394,7 @@
 </p:sld>
 </file>
 
-<file path=ppt/slides/slide28.xml><?xml version="1.0" encoding="utf-8"?>
+<file path=ppt/slides/slide29.xml><?xml version="1.0" encoding="utf-8"?>
 <p:sld xmlns:a="http://schemas.openxmlformats.org/drawingml/2006/main" xmlns:r="http://schemas.openxmlformats.org/officeDocument/2006/relationships" xmlns:p="http://schemas.openxmlformats.org/presentationml/2006/main">
   <p:cSld>
     <p:bg>
@@ -15373,7 +15726,636 @@
 </p:sld>
 </file>
 
-<file path=ppt/slides/slide29.xml><?xml version="1.0" encoding="utf-8"?>
+<file path=ppt/slides/slide3.xml><?xml version="1.0" encoding="utf-8"?>
+<p:sld xmlns:a="http://schemas.openxmlformats.org/drawingml/2006/main" xmlns:r="http://schemas.openxmlformats.org/officeDocument/2006/relationships" xmlns:p="http://schemas.openxmlformats.org/presentationml/2006/main">
+  <p:cSld>
+    <p:bg>
+      <p:bgPr>
+        <a:solidFill>
+          <a:schemeClr val="bg1"/>
+        </a:solidFill>
+        <a:effectLst/>
+      </p:bgPr>
+    </p:bg>
+    <p:spTree>
+      <p:nvGrpSpPr>
+        <p:cNvPr id="1" name="">
+          <a:extLst>
+            <a:ext uri="{FF2B5EF4-FFF2-40B4-BE49-F238E27FC236}">
+              <a16:creationId xmlns:a16="http://schemas.microsoft.com/office/drawing/2014/main" id="{A0DC4AA3-0022-BA0D-9E7D-66B13B5B9A75}"/>
+            </a:ext>
+          </a:extLst>
+        </p:cNvPr>
+        <p:cNvGrpSpPr/>
+        <p:nvPr/>
+      </p:nvGrpSpPr>
+      <p:grpSpPr>
+        <a:xfrm>
+          <a:off x="0" y="0"/>
+          <a:ext cx="0" cy="0"/>
+          <a:chOff x="0" y="0"/>
+          <a:chExt cx="0" cy="0"/>
+        </a:xfrm>
+      </p:grpSpPr>
+      <p:sp>
+        <p:nvSpPr>
+          <p:cNvPr id="2" name="Rectangle 1">
+            <a:extLst>
+              <a:ext uri="{FF2B5EF4-FFF2-40B4-BE49-F238E27FC236}">
+                <a16:creationId xmlns:a16="http://schemas.microsoft.com/office/drawing/2014/main" id="{BB713812-7693-7A33-F95C-E7CBF82C0AC7}"/>
+              </a:ext>
+            </a:extLst>
+          </p:cNvPr>
+          <p:cNvSpPr/>
+          <p:nvPr/>
+        </p:nvSpPr>
+        <p:spPr>
+          <a:xfrm>
+            <a:off x="-795" y="25399"/>
+            <a:ext cx="10285413" cy="9144000"/>
+          </a:xfrm>
+          <a:prstGeom prst="rect">
+            <a:avLst/>
+          </a:prstGeom>
+          <a:gradFill flip="none" rotWithShape="1">
+            <a:gsLst>
+              <a:gs pos="0">
+                <a:srgbClr val="FF0000">
+                  <a:tint val="66000"/>
+                  <a:satMod val="160000"/>
+                </a:srgbClr>
+              </a:gs>
+              <a:gs pos="50000">
+                <a:srgbClr val="FF0000">
+                  <a:tint val="44500"/>
+                  <a:satMod val="160000"/>
+                </a:srgbClr>
+              </a:gs>
+              <a:gs pos="100000">
+                <a:srgbClr val="FF0000">
+                  <a:tint val="23500"/>
+                  <a:satMod val="160000"/>
+                </a:srgbClr>
+              </a:gs>
+            </a:gsLst>
+            <a:lin ang="13500000" scaled="1"/>
+            <a:tileRect/>
+          </a:gradFill>
+          <a:ln w="31750">
+            <a:solidFill>
+              <a:schemeClr val="accent1">
+                <a:shade val="15000"/>
+              </a:schemeClr>
+            </a:solidFill>
+          </a:ln>
+        </p:spPr>
+        <p:style>
+          <a:lnRef idx="2">
+            <a:schemeClr val="accent1">
+              <a:shade val="15000"/>
+            </a:schemeClr>
+          </a:lnRef>
+          <a:fillRef idx="1">
+            <a:schemeClr val="accent1"/>
+          </a:fillRef>
+          <a:effectRef idx="0">
+            <a:schemeClr val="accent1"/>
+          </a:effectRef>
+          <a:fontRef idx="minor">
+            <a:schemeClr val="lt1"/>
+          </a:fontRef>
+        </p:style>
+        <p:txBody>
+          <a:bodyPr rtlCol="0" anchor="ctr"/>
+          <a:lstStyle/>
+          <a:p>
+            <a:pPr marL="0" algn="ctr" defTabSz="457200" rtl="1" eaLnBrk="1" latinLnBrk="0" hangingPunct="1"/>
+            <a:endParaRPr lang="en-DE" dirty="0">
+              <a:latin typeface="Patrick Hand" pitchFamily="2" charset="77"/>
+            </a:endParaRPr>
+          </a:p>
+        </p:txBody>
+      </p:sp>
+      <p:sp>
+        <p:nvSpPr>
+          <p:cNvPr id="5" name="Rectangle 4">
+            <a:extLst>
+              <a:ext uri="{FF2B5EF4-FFF2-40B4-BE49-F238E27FC236}">
+                <a16:creationId xmlns:a16="http://schemas.microsoft.com/office/drawing/2014/main" id="{389978CD-953A-DE5A-0C5E-B22506EFEBA5}"/>
+              </a:ext>
+            </a:extLst>
+          </p:cNvPr>
+          <p:cNvSpPr/>
+          <p:nvPr/>
+        </p:nvSpPr>
+        <p:spPr>
+          <a:xfrm>
+            <a:off x="-794" y="9144000"/>
+            <a:ext cx="10285413" cy="9144000"/>
+          </a:xfrm>
+          <a:prstGeom prst="rect">
+            <a:avLst/>
+          </a:prstGeom>
+          <a:gradFill flip="none" rotWithShape="1">
+            <a:gsLst>
+              <a:gs pos="0">
+                <a:schemeClr val="accent6">
+                  <a:tint val="66000"/>
+                  <a:satMod val="160000"/>
+                </a:schemeClr>
+              </a:gs>
+              <a:gs pos="50000">
+                <a:schemeClr val="accent6">
+                  <a:tint val="44500"/>
+                  <a:satMod val="160000"/>
+                </a:schemeClr>
+              </a:gs>
+              <a:gs pos="100000">
+                <a:schemeClr val="accent6">
+                  <a:tint val="23500"/>
+                  <a:satMod val="160000"/>
+                </a:schemeClr>
+              </a:gs>
+            </a:gsLst>
+            <a:lin ang="13500000" scaled="1"/>
+            <a:tileRect/>
+          </a:gradFill>
+          <a:ln w="31750">
+            <a:solidFill>
+              <a:schemeClr val="accent1">
+                <a:shade val="15000"/>
+              </a:schemeClr>
+            </a:solidFill>
+          </a:ln>
+        </p:spPr>
+        <p:style>
+          <a:lnRef idx="2">
+            <a:schemeClr val="accent1">
+              <a:shade val="15000"/>
+            </a:schemeClr>
+          </a:lnRef>
+          <a:fillRef idx="1">
+            <a:schemeClr val="accent1"/>
+          </a:fillRef>
+          <a:effectRef idx="0">
+            <a:schemeClr val="accent1"/>
+          </a:effectRef>
+          <a:fontRef idx="minor">
+            <a:schemeClr val="lt1"/>
+          </a:fontRef>
+        </p:style>
+        <p:txBody>
+          <a:bodyPr rtlCol="0" anchor="ctr"/>
+          <a:lstStyle/>
+          <a:p>
+            <a:pPr marL="0" algn="ctr" defTabSz="457200" rtl="1" eaLnBrk="1" latinLnBrk="0" hangingPunct="1"/>
+            <a:endParaRPr lang="en-DE" dirty="0">
+              <a:latin typeface="Patrick Hand" pitchFamily="2" charset="77"/>
+            </a:endParaRPr>
+          </a:p>
+        </p:txBody>
+      </p:sp>
+      <p:pic>
+        <p:nvPicPr>
+          <p:cNvPr id="6" name="Picture 5">
+            <a:extLst>
+              <a:ext uri="{FF2B5EF4-FFF2-40B4-BE49-F238E27FC236}">
+                <a16:creationId xmlns:a16="http://schemas.microsoft.com/office/drawing/2014/main" id="{E9CF1C6B-B5DF-DB15-335C-9EF9D02E2644}"/>
+              </a:ext>
+            </a:extLst>
+          </p:cNvPr>
+          <p:cNvPicPr>
+            <a:picLocks noChangeAspect="1"/>
+          </p:cNvPicPr>
+          <p:nvPr/>
+        </p:nvPicPr>
+        <p:blipFill rotWithShape="1">
+          <a:blip r:embed="rId3"/>
+          <a:srcRect l="21500" t="36257" r="12564" b="17086"/>
+          <a:stretch>
+            <a:fillRect/>
+          </a:stretch>
+        </p:blipFill>
+        <p:spPr>
+          <a:xfrm>
+            <a:off x="9333" y="2819400"/>
+            <a:ext cx="10315977" cy="5486400"/>
+          </a:xfrm>
+          <a:prstGeom prst="rect">
+            <a:avLst/>
+          </a:prstGeom>
+        </p:spPr>
+      </p:pic>
+      <p:pic>
+        <p:nvPicPr>
+          <p:cNvPr id="7" name="Picture 6">
+            <a:extLst>
+              <a:ext uri="{FF2B5EF4-FFF2-40B4-BE49-F238E27FC236}">
+                <a16:creationId xmlns:a16="http://schemas.microsoft.com/office/drawing/2014/main" id="{F75C1FB9-F7E4-D807-6D39-929DB29A7EFE}"/>
+              </a:ext>
+            </a:extLst>
+          </p:cNvPr>
+          <p:cNvPicPr>
+            <a:picLocks noChangeAspect="1"/>
+          </p:cNvPicPr>
+          <p:nvPr/>
+        </p:nvPicPr>
+        <p:blipFill rotWithShape="1">
+          <a:blip r:embed="rId4"/>
+          <a:srcRect l="15971" t="42773" r="9579" b="22419"/>
+          <a:stretch>
+            <a:fillRect/>
+          </a:stretch>
+        </p:blipFill>
+        <p:spPr>
+          <a:xfrm>
+            <a:off x="-30564" y="12598400"/>
+            <a:ext cx="10305074" cy="2006600"/>
+          </a:xfrm>
+          <a:prstGeom prst="rect">
+            <a:avLst/>
+          </a:prstGeom>
+        </p:spPr>
+      </p:pic>
+      <p:sp>
+        <p:nvSpPr>
+          <p:cNvPr id="10" name="Rectangle 9">
+            <a:extLst>
+              <a:ext uri="{FF2B5EF4-FFF2-40B4-BE49-F238E27FC236}">
+                <a16:creationId xmlns:a16="http://schemas.microsoft.com/office/drawing/2014/main" id="{F931037C-127C-092B-3046-21C5E1305743}"/>
+              </a:ext>
+            </a:extLst>
+          </p:cNvPr>
+          <p:cNvSpPr/>
+          <p:nvPr/>
+        </p:nvSpPr>
+        <p:spPr>
+          <a:xfrm>
+            <a:off x="1577100" y="981670"/>
+            <a:ext cx="7131212" cy="1323439"/>
+          </a:xfrm>
+          <a:prstGeom prst="rect">
+            <a:avLst/>
+          </a:prstGeom>
+          <a:noFill/>
+          <a:ln>
+            <a:noFill/>
+          </a:ln>
+        </p:spPr>
+        <p:style>
+          <a:lnRef idx="0">
+            <a:scrgbClr r="0" g="0" b="0"/>
+          </a:lnRef>
+          <a:fillRef idx="0">
+            <a:scrgbClr r="0" g="0" b="0"/>
+          </a:fillRef>
+          <a:effectRef idx="0">
+            <a:scrgbClr r="0" g="0" b="0"/>
+          </a:effectRef>
+          <a:fontRef idx="minor">
+            <a:schemeClr val="accent6"/>
+          </a:fontRef>
+        </p:style>
+        <p:txBody>
+          <a:bodyPr wrap="square" lIns="91440" tIns="45720" rIns="91440" bIns="45720">
+            <a:spAutoFit/>
+          </a:bodyPr>
+          <a:lstStyle/>
+          <a:p>
+            <a:pPr algn="ctr"/>
+            <a:r>
+              <a:rPr lang="en-GB" sz="8000" b="1" dirty="0">
+                <a:ln w="6600">
+                  <a:solidFill>
+                    <a:schemeClr val="accent2"/>
+                  </a:solidFill>
+                  <a:prstDash val="solid"/>
+                </a:ln>
+                <a:solidFill>
+                  <a:srgbClr val="FFFFFF"/>
+                </a:solidFill>
+                <a:effectLst>
+                  <a:outerShdw dist="38100" dir="2700000" algn="tl" rotWithShape="0">
+                    <a:schemeClr val="accent2"/>
+                  </a:outerShdw>
+                </a:effectLst>
+                <a:latin typeface="Patrick Hand" pitchFamily="2" charset="77"/>
+              </a:rPr>
+              <a:t>DIRTY CODE</a:t>
+            </a:r>
+          </a:p>
+        </p:txBody>
+      </p:sp>
+      <p:pic>
+        <p:nvPicPr>
+          <p:cNvPr id="12" name="Graphic 11" descr="Close with solid fill">
+            <a:extLst>
+              <a:ext uri="{FF2B5EF4-FFF2-40B4-BE49-F238E27FC236}">
+                <a16:creationId xmlns:a16="http://schemas.microsoft.com/office/drawing/2014/main" id="{28F1D416-1464-F569-BAAC-4CE3AC639CD1}"/>
+              </a:ext>
+            </a:extLst>
+          </p:cNvPr>
+          <p:cNvPicPr>
+            <a:picLocks noChangeAspect="1"/>
+          </p:cNvPicPr>
+          <p:nvPr/>
+        </p:nvPicPr>
+        <p:blipFill>
+          <a:blip r:embed="rId5">
+            <a:extLst>
+              <a:ext uri="{96DAC541-7B7A-43D3-8B79-37D633B846F1}">
+                <asvg:svgBlip xmlns:asvg="http://schemas.microsoft.com/office/drawing/2016/SVG/main" r:embed="rId6"/>
+              </a:ext>
+            </a:extLst>
+          </a:blip>
+          <a:stretch>
+            <a:fillRect/>
+          </a:stretch>
+        </p:blipFill>
+        <p:spPr>
+          <a:xfrm>
+            <a:off x="7678818" y="1219200"/>
+            <a:ext cx="914400" cy="914400"/>
+          </a:xfrm>
+          <a:prstGeom prst="rect">
+            <a:avLst/>
+          </a:prstGeom>
+        </p:spPr>
+      </p:pic>
+      <p:pic>
+        <p:nvPicPr>
+          <p:cNvPr id="14" name="Graphic 13" descr="Tick with solid fill">
+            <a:extLst>
+              <a:ext uri="{FF2B5EF4-FFF2-40B4-BE49-F238E27FC236}">
+                <a16:creationId xmlns:a16="http://schemas.microsoft.com/office/drawing/2014/main" id="{F2663517-508C-9559-F50A-E9F1B59AB837}"/>
+              </a:ext>
+            </a:extLst>
+          </p:cNvPr>
+          <p:cNvPicPr>
+            <a:picLocks noChangeAspect="1"/>
+          </p:cNvPicPr>
+          <p:nvPr/>
+        </p:nvPicPr>
+        <p:blipFill>
+          <a:blip r:embed="rId7">
+            <a:extLst>
+              <a:ext uri="{96DAC541-7B7A-43D3-8B79-37D633B846F1}">
+                <asvg:svgBlip xmlns:asvg="http://schemas.microsoft.com/office/drawing/2016/SVG/main" r:embed="rId8"/>
+              </a:ext>
+            </a:extLst>
+          </a:blip>
+          <a:stretch>
+            <a:fillRect/>
+          </a:stretch>
+        </p:blipFill>
+        <p:spPr>
+          <a:xfrm>
+            <a:off x="7793912" y="10998200"/>
+            <a:ext cx="914400" cy="914400"/>
+          </a:xfrm>
+          <a:prstGeom prst="rect">
+            <a:avLst/>
+          </a:prstGeom>
+        </p:spPr>
+      </p:pic>
+      <p:sp>
+        <p:nvSpPr>
+          <p:cNvPr id="15" name="Rectangle 14">
+            <a:extLst>
+              <a:ext uri="{FF2B5EF4-FFF2-40B4-BE49-F238E27FC236}">
+                <a16:creationId xmlns:a16="http://schemas.microsoft.com/office/drawing/2014/main" id="{3C884966-F1E0-E28C-8306-94E3476AE9EB}"/>
+              </a:ext>
+            </a:extLst>
+          </p:cNvPr>
+          <p:cNvSpPr/>
+          <p:nvPr/>
+        </p:nvSpPr>
+        <p:spPr>
+          <a:xfrm>
+            <a:off x="1462006" y="10805060"/>
+            <a:ext cx="7131212" cy="1323439"/>
+          </a:xfrm>
+          <a:prstGeom prst="rect">
+            <a:avLst/>
+          </a:prstGeom>
+          <a:noFill/>
+          <a:ln>
+            <a:noFill/>
+          </a:ln>
+        </p:spPr>
+        <p:style>
+          <a:lnRef idx="0">
+            <a:scrgbClr r="0" g="0" b="0"/>
+          </a:lnRef>
+          <a:fillRef idx="0">
+            <a:scrgbClr r="0" g="0" b="0"/>
+          </a:fillRef>
+          <a:effectRef idx="0">
+            <a:scrgbClr r="0" g="0" b="0"/>
+          </a:effectRef>
+          <a:fontRef idx="minor">
+            <a:schemeClr val="accent6"/>
+          </a:fontRef>
+        </p:style>
+        <p:txBody>
+          <a:bodyPr wrap="square" lIns="91440" tIns="45720" rIns="91440" bIns="45720">
+            <a:spAutoFit/>
+          </a:bodyPr>
+          <a:lstStyle/>
+          <a:p>
+            <a:pPr algn="ctr"/>
+            <a:r>
+              <a:rPr lang="en-GB" sz="8000" b="1" dirty="0">
+                <a:ln w="12700">
+                  <a:solidFill>
+                    <a:srgbClr val="00B050"/>
+                  </a:solidFill>
+                  <a:prstDash val="solid"/>
+                </a:ln>
+                <a:pattFill prst="pct50">
+                  <a:fgClr>
+                    <a:schemeClr val="accent1"/>
+                  </a:fgClr>
+                  <a:bgClr>
+                    <a:schemeClr val="accent1">
+                      <a:lumMod val="20000"/>
+                      <a:lumOff val="80000"/>
+                    </a:schemeClr>
+                  </a:bgClr>
+                </a:pattFill>
+                <a:effectLst>
+                  <a:outerShdw dist="38100" dir="2640000" algn="bl" rotWithShape="0">
+                    <a:schemeClr val="accent1"/>
+                  </a:outerShdw>
+                </a:effectLst>
+                <a:latin typeface="Patrick Hand" pitchFamily="2" charset="77"/>
+              </a:rPr>
+              <a:t>CLEAN CODE</a:t>
+            </a:r>
+          </a:p>
+        </p:txBody>
+      </p:sp>
+      <p:sp>
+        <p:nvSpPr>
+          <p:cNvPr id="18" name="Down Arrow 17">
+            <a:extLst>
+              <a:ext uri="{FF2B5EF4-FFF2-40B4-BE49-F238E27FC236}">
+                <a16:creationId xmlns:a16="http://schemas.microsoft.com/office/drawing/2014/main" id="{F519B709-69F6-84B3-4A2B-206F2AAA7983}"/>
+              </a:ext>
+            </a:extLst>
+          </p:cNvPr>
+          <p:cNvSpPr/>
+          <p:nvPr/>
+        </p:nvSpPr>
+        <p:spPr>
+          <a:xfrm>
+            <a:off x="3683000" y="8610600"/>
+            <a:ext cx="2921000" cy="2194460"/>
+          </a:xfrm>
+          <a:prstGeom prst="downArrow">
+            <a:avLst/>
+          </a:prstGeom>
+          <a:solidFill>
+            <a:schemeClr val="bg1"/>
+          </a:solidFill>
+          <a:ln w="31750">
+            <a:solidFill>
+              <a:schemeClr val="accent1">
+                <a:shade val="15000"/>
+              </a:schemeClr>
+            </a:solidFill>
+          </a:ln>
+        </p:spPr>
+        <p:style>
+          <a:lnRef idx="2">
+            <a:schemeClr val="accent1">
+              <a:shade val="15000"/>
+            </a:schemeClr>
+          </a:lnRef>
+          <a:fillRef idx="1">
+            <a:schemeClr val="accent1"/>
+          </a:fillRef>
+          <a:effectRef idx="0">
+            <a:schemeClr val="accent1"/>
+          </a:effectRef>
+          <a:fontRef idx="minor">
+            <a:schemeClr val="lt1"/>
+          </a:fontRef>
+        </p:style>
+        <p:txBody>
+          <a:bodyPr rtlCol="0" anchor="ctr"/>
+          <a:lstStyle/>
+          <a:p>
+            <a:pPr marL="0" algn="ctr" defTabSz="457200" rtl="0" eaLnBrk="1" latinLnBrk="0" hangingPunct="1"/>
+            <a:endParaRPr lang="en-DE" dirty="0">
+              <a:latin typeface="Patrick Hand" pitchFamily="2" charset="77"/>
+            </a:endParaRPr>
+          </a:p>
+        </p:txBody>
+      </p:sp>
+      <p:sp>
+        <p:nvSpPr>
+          <p:cNvPr id="3" name="Rectangle 2">
+            <a:extLst>
+              <a:ext uri="{FF2B5EF4-FFF2-40B4-BE49-F238E27FC236}">
+                <a16:creationId xmlns:a16="http://schemas.microsoft.com/office/drawing/2014/main" id="{0A3573D3-02FD-8867-C498-4782AE7F0917}"/>
+              </a:ext>
+            </a:extLst>
+          </p:cNvPr>
+          <p:cNvSpPr/>
+          <p:nvPr/>
+        </p:nvSpPr>
+        <p:spPr>
+          <a:xfrm>
+            <a:off x="-8208470" y="2819400"/>
+            <a:ext cx="7768473" cy="923330"/>
+          </a:xfrm>
+          <a:prstGeom prst="rect">
+            <a:avLst/>
+          </a:prstGeom>
+          <a:ln>
+            <a:solidFill>
+              <a:schemeClr val="tx1"/>
+            </a:solidFill>
+          </a:ln>
+        </p:spPr>
+        <p:style>
+          <a:lnRef idx="1">
+            <a:schemeClr val="accent6"/>
+          </a:lnRef>
+          <a:fillRef idx="2">
+            <a:schemeClr val="accent6"/>
+          </a:fillRef>
+          <a:effectRef idx="1">
+            <a:schemeClr val="accent6"/>
+          </a:effectRef>
+          <a:fontRef idx="minor">
+            <a:schemeClr val="dk1"/>
+          </a:fontRef>
+        </p:style>
+        <p:txBody>
+          <a:bodyPr wrap="none" lIns="91440" tIns="45720" rIns="91440" bIns="45720">
+            <a:spAutoFit/>
+            <a:scene3d>
+              <a:camera prst="orthographicFront"/>
+              <a:lightRig rig="soft" dir="t">
+                <a:rot lat="0" lon="0" rev="15600000"/>
+              </a:lightRig>
+            </a:scene3d>
+            <a:sp3d extrusionH="57150" prstMaterial="softEdge">
+              <a:bevelT w="25400" h="38100"/>
+            </a:sp3d>
+          </a:bodyPr>
+          <a:lstStyle/>
+          <a:p>
+            <a:pPr algn="ctr"/>
+            <a:r>
+              <a:rPr lang="en-GB" sz="5400" dirty="0">
+                <a:ln w="0"/>
+                <a:solidFill>
+                  <a:schemeClr val="tx1"/>
+                </a:solidFill>
+                <a:effectLst>
+                  <a:outerShdw blurRad="38100" dist="19050" dir="2700000" algn="tl" rotWithShape="0">
+                    <a:schemeClr val="dk1">
+                      <a:alpha val="40000"/>
+                    </a:schemeClr>
+                  </a:outerShdw>
+                </a:effectLst>
+                <a:latin typeface="Patrick Hand" pitchFamily="2" charset="77"/>
+              </a:rPr>
+              <a:t>py_002_list_comprehensions</a:t>
+            </a:r>
+            <a:endParaRPr lang="en-DE" sz="5400" dirty="0">
+              <a:ln w="0"/>
+              <a:solidFill>
+                <a:schemeClr val="tx1"/>
+              </a:solidFill>
+              <a:effectLst>
+                <a:outerShdw blurRad="38100" dist="19050" dir="2700000" algn="tl" rotWithShape="0">
+                  <a:schemeClr val="dk1">
+                    <a:alpha val="40000"/>
+                  </a:schemeClr>
+                </a:outerShdw>
+              </a:effectLst>
+            </a:endParaRPr>
+          </a:p>
+        </p:txBody>
+      </p:sp>
+    </p:spTree>
+    <p:extLst>
+      <p:ext uri="{BB962C8B-B14F-4D97-AF65-F5344CB8AC3E}">
+        <p14:creationId xmlns:p14="http://schemas.microsoft.com/office/powerpoint/2010/main" val="1367177939"/>
+      </p:ext>
+    </p:extLst>
+  </p:cSld>
+  <p:clrMapOvr>
+    <a:masterClrMapping/>
+  </p:clrMapOvr>
+</p:sld>
+</file>
+
+<file path=ppt/slides/slide30.xml><?xml version="1.0" encoding="utf-8"?>
 <p:sld xmlns:a="http://schemas.openxmlformats.org/drawingml/2006/main" xmlns:r="http://schemas.openxmlformats.org/officeDocument/2006/relationships" xmlns:p="http://schemas.openxmlformats.org/presentationml/2006/main">
   <p:cSld>
     <p:bg>
@@ -15750,636 +16732,7 @@
 </p:sld>
 </file>
 
-<file path=ppt/slides/slide3.xml><?xml version="1.0" encoding="utf-8"?>
-<p:sld xmlns:a="http://schemas.openxmlformats.org/drawingml/2006/main" xmlns:r="http://schemas.openxmlformats.org/officeDocument/2006/relationships" xmlns:p="http://schemas.openxmlformats.org/presentationml/2006/main">
-  <p:cSld>
-    <p:bg>
-      <p:bgPr>
-        <a:solidFill>
-          <a:schemeClr val="bg1"/>
-        </a:solidFill>
-        <a:effectLst/>
-      </p:bgPr>
-    </p:bg>
-    <p:spTree>
-      <p:nvGrpSpPr>
-        <p:cNvPr id="1" name="">
-          <a:extLst>
-            <a:ext uri="{FF2B5EF4-FFF2-40B4-BE49-F238E27FC236}">
-              <a16:creationId xmlns:a16="http://schemas.microsoft.com/office/drawing/2014/main" id="{A0DC4AA3-0022-BA0D-9E7D-66B13B5B9A75}"/>
-            </a:ext>
-          </a:extLst>
-        </p:cNvPr>
-        <p:cNvGrpSpPr/>
-        <p:nvPr/>
-      </p:nvGrpSpPr>
-      <p:grpSpPr>
-        <a:xfrm>
-          <a:off x="0" y="0"/>
-          <a:ext cx="0" cy="0"/>
-          <a:chOff x="0" y="0"/>
-          <a:chExt cx="0" cy="0"/>
-        </a:xfrm>
-      </p:grpSpPr>
-      <p:sp>
-        <p:nvSpPr>
-          <p:cNvPr id="2" name="Rectangle 1">
-            <a:extLst>
-              <a:ext uri="{FF2B5EF4-FFF2-40B4-BE49-F238E27FC236}">
-                <a16:creationId xmlns:a16="http://schemas.microsoft.com/office/drawing/2014/main" id="{BB713812-7693-7A33-F95C-E7CBF82C0AC7}"/>
-              </a:ext>
-            </a:extLst>
-          </p:cNvPr>
-          <p:cNvSpPr/>
-          <p:nvPr/>
-        </p:nvSpPr>
-        <p:spPr>
-          <a:xfrm>
-            <a:off x="-795" y="25399"/>
-            <a:ext cx="10285413" cy="9144000"/>
-          </a:xfrm>
-          <a:prstGeom prst="rect">
-            <a:avLst/>
-          </a:prstGeom>
-          <a:gradFill flip="none" rotWithShape="1">
-            <a:gsLst>
-              <a:gs pos="0">
-                <a:srgbClr val="FF0000">
-                  <a:tint val="66000"/>
-                  <a:satMod val="160000"/>
-                </a:srgbClr>
-              </a:gs>
-              <a:gs pos="50000">
-                <a:srgbClr val="FF0000">
-                  <a:tint val="44500"/>
-                  <a:satMod val="160000"/>
-                </a:srgbClr>
-              </a:gs>
-              <a:gs pos="100000">
-                <a:srgbClr val="FF0000">
-                  <a:tint val="23500"/>
-                  <a:satMod val="160000"/>
-                </a:srgbClr>
-              </a:gs>
-            </a:gsLst>
-            <a:lin ang="13500000" scaled="1"/>
-            <a:tileRect/>
-          </a:gradFill>
-          <a:ln w="31750">
-            <a:solidFill>
-              <a:schemeClr val="accent1">
-                <a:shade val="15000"/>
-              </a:schemeClr>
-            </a:solidFill>
-          </a:ln>
-        </p:spPr>
-        <p:style>
-          <a:lnRef idx="2">
-            <a:schemeClr val="accent1">
-              <a:shade val="15000"/>
-            </a:schemeClr>
-          </a:lnRef>
-          <a:fillRef idx="1">
-            <a:schemeClr val="accent1"/>
-          </a:fillRef>
-          <a:effectRef idx="0">
-            <a:schemeClr val="accent1"/>
-          </a:effectRef>
-          <a:fontRef idx="minor">
-            <a:schemeClr val="lt1"/>
-          </a:fontRef>
-        </p:style>
-        <p:txBody>
-          <a:bodyPr rtlCol="0" anchor="ctr"/>
-          <a:lstStyle/>
-          <a:p>
-            <a:pPr marL="0" algn="ctr" defTabSz="457200" rtl="1" eaLnBrk="1" latinLnBrk="0" hangingPunct="1"/>
-            <a:endParaRPr lang="en-DE" dirty="0">
-              <a:latin typeface="Patrick Hand" pitchFamily="2" charset="77"/>
-            </a:endParaRPr>
-          </a:p>
-        </p:txBody>
-      </p:sp>
-      <p:sp>
-        <p:nvSpPr>
-          <p:cNvPr id="5" name="Rectangle 4">
-            <a:extLst>
-              <a:ext uri="{FF2B5EF4-FFF2-40B4-BE49-F238E27FC236}">
-                <a16:creationId xmlns:a16="http://schemas.microsoft.com/office/drawing/2014/main" id="{389978CD-953A-DE5A-0C5E-B22506EFEBA5}"/>
-              </a:ext>
-            </a:extLst>
-          </p:cNvPr>
-          <p:cNvSpPr/>
-          <p:nvPr/>
-        </p:nvSpPr>
-        <p:spPr>
-          <a:xfrm>
-            <a:off x="-794" y="9144000"/>
-            <a:ext cx="10285413" cy="9144000"/>
-          </a:xfrm>
-          <a:prstGeom prst="rect">
-            <a:avLst/>
-          </a:prstGeom>
-          <a:gradFill flip="none" rotWithShape="1">
-            <a:gsLst>
-              <a:gs pos="0">
-                <a:schemeClr val="accent6">
-                  <a:tint val="66000"/>
-                  <a:satMod val="160000"/>
-                </a:schemeClr>
-              </a:gs>
-              <a:gs pos="50000">
-                <a:schemeClr val="accent6">
-                  <a:tint val="44500"/>
-                  <a:satMod val="160000"/>
-                </a:schemeClr>
-              </a:gs>
-              <a:gs pos="100000">
-                <a:schemeClr val="accent6">
-                  <a:tint val="23500"/>
-                  <a:satMod val="160000"/>
-                </a:schemeClr>
-              </a:gs>
-            </a:gsLst>
-            <a:lin ang="13500000" scaled="1"/>
-            <a:tileRect/>
-          </a:gradFill>
-          <a:ln w="31750">
-            <a:solidFill>
-              <a:schemeClr val="accent1">
-                <a:shade val="15000"/>
-              </a:schemeClr>
-            </a:solidFill>
-          </a:ln>
-        </p:spPr>
-        <p:style>
-          <a:lnRef idx="2">
-            <a:schemeClr val="accent1">
-              <a:shade val="15000"/>
-            </a:schemeClr>
-          </a:lnRef>
-          <a:fillRef idx="1">
-            <a:schemeClr val="accent1"/>
-          </a:fillRef>
-          <a:effectRef idx="0">
-            <a:schemeClr val="accent1"/>
-          </a:effectRef>
-          <a:fontRef idx="minor">
-            <a:schemeClr val="lt1"/>
-          </a:fontRef>
-        </p:style>
-        <p:txBody>
-          <a:bodyPr rtlCol="0" anchor="ctr"/>
-          <a:lstStyle/>
-          <a:p>
-            <a:pPr marL="0" algn="ctr" defTabSz="457200" rtl="1" eaLnBrk="1" latinLnBrk="0" hangingPunct="1"/>
-            <a:endParaRPr lang="en-DE" dirty="0">
-              <a:latin typeface="Patrick Hand" pitchFamily="2" charset="77"/>
-            </a:endParaRPr>
-          </a:p>
-        </p:txBody>
-      </p:sp>
-      <p:pic>
-        <p:nvPicPr>
-          <p:cNvPr id="6" name="Picture 5">
-            <a:extLst>
-              <a:ext uri="{FF2B5EF4-FFF2-40B4-BE49-F238E27FC236}">
-                <a16:creationId xmlns:a16="http://schemas.microsoft.com/office/drawing/2014/main" id="{E9CF1C6B-B5DF-DB15-335C-9EF9D02E2644}"/>
-              </a:ext>
-            </a:extLst>
-          </p:cNvPr>
-          <p:cNvPicPr>
-            <a:picLocks noChangeAspect="1"/>
-          </p:cNvPicPr>
-          <p:nvPr/>
-        </p:nvPicPr>
-        <p:blipFill rotWithShape="1">
-          <a:blip r:embed="rId3"/>
-          <a:srcRect l="21500" t="36257" r="12564" b="17086"/>
-          <a:stretch>
-            <a:fillRect/>
-          </a:stretch>
-        </p:blipFill>
-        <p:spPr>
-          <a:xfrm>
-            <a:off x="9333" y="2819400"/>
-            <a:ext cx="10315977" cy="5486400"/>
-          </a:xfrm>
-          <a:prstGeom prst="rect">
-            <a:avLst/>
-          </a:prstGeom>
-        </p:spPr>
-      </p:pic>
-      <p:pic>
-        <p:nvPicPr>
-          <p:cNvPr id="7" name="Picture 6">
-            <a:extLst>
-              <a:ext uri="{FF2B5EF4-FFF2-40B4-BE49-F238E27FC236}">
-                <a16:creationId xmlns:a16="http://schemas.microsoft.com/office/drawing/2014/main" id="{F75C1FB9-F7E4-D807-6D39-929DB29A7EFE}"/>
-              </a:ext>
-            </a:extLst>
-          </p:cNvPr>
-          <p:cNvPicPr>
-            <a:picLocks noChangeAspect="1"/>
-          </p:cNvPicPr>
-          <p:nvPr/>
-        </p:nvPicPr>
-        <p:blipFill rotWithShape="1">
-          <a:blip r:embed="rId4"/>
-          <a:srcRect l="15971" t="42773" r="9579" b="22419"/>
-          <a:stretch>
-            <a:fillRect/>
-          </a:stretch>
-        </p:blipFill>
-        <p:spPr>
-          <a:xfrm>
-            <a:off x="-30564" y="12598400"/>
-            <a:ext cx="10305074" cy="2006600"/>
-          </a:xfrm>
-          <a:prstGeom prst="rect">
-            <a:avLst/>
-          </a:prstGeom>
-        </p:spPr>
-      </p:pic>
-      <p:sp>
-        <p:nvSpPr>
-          <p:cNvPr id="10" name="Rectangle 9">
-            <a:extLst>
-              <a:ext uri="{FF2B5EF4-FFF2-40B4-BE49-F238E27FC236}">
-                <a16:creationId xmlns:a16="http://schemas.microsoft.com/office/drawing/2014/main" id="{F931037C-127C-092B-3046-21C5E1305743}"/>
-              </a:ext>
-            </a:extLst>
-          </p:cNvPr>
-          <p:cNvSpPr/>
-          <p:nvPr/>
-        </p:nvSpPr>
-        <p:spPr>
-          <a:xfrm>
-            <a:off x="1577100" y="981670"/>
-            <a:ext cx="7131212" cy="1323439"/>
-          </a:xfrm>
-          <a:prstGeom prst="rect">
-            <a:avLst/>
-          </a:prstGeom>
-          <a:noFill/>
-          <a:ln>
-            <a:noFill/>
-          </a:ln>
-        </p:spPr>
-        <p:style>
-          <a:lnRef idx="0">
-            <a:scrgbClr r="0" g="0" b="0"/>
-          </a:lnRef>
-          <a:fillRef idx="0">
-            <a:scrgbClr r="0" g="0" b="0"/>
-          </a:fillRef>
-          <a:effectRef idx="0">
-            <a:scrgbClr r="0" g="0" b="0"/>
-          </a:effectRef>
-          <a:fontRef idx="minor">
-            <a:schemeClr val="accent6"/>
-          </a:fontRef>
-        </p:style>
-        <p:txBody>
-          <a:bodyPr wrap="square" lIns="91440" tIns="45720" rIns="91440" bIns="45720">
-            <a:spAutoFit/>
-          </a:bodyPr>
-          <a:lstStyle/>
-          <a:p>
-            <a:pPr algn="ctr"/>
-            <a:r>
-              <a:rPr lang="en-GB" sz="8000" b="1" dirty="0">
-                <a:ln w="6600">
-                  <a:solidFill>
-                    <a:schemeClr val="accent2"/>
-                  </a:solidFill>
-                  <a:prstDash val="solid"/>
-                </a:ln>
-                <a:solidFill>
-                  <a:srgbClr val="FFFFFF"/>
-                </a:solidFill>
-                <a:effectLst>
-                  <a:outerShdw dist="38100" dir="2700000" algn="tl" rotWithShape="0">
-                    <a:schemeClr val="accent2"/>
-                  </a:outerShdw>
-                </a:effectLst>
-                <a:latin typeface="Patrick Hand" pitchFamily="2" charset="77"/>
-              </a:rPr>
-              <a:t>DIRTY CODE</a:t>
-            </a:r>
-          </a:p>
-        </p:txBody>
-      </p:sp>
-      <p:pic>
-        <p:nvPicPr>
-          <p:cNvPr id="12" name="Graphic 11" descr="Close with solid fill">
-            <a:extLst>
-              <a:ext uri="{FF2B5EF4-FFF2-40B4-BE49-F238E27FC236}">
-                <a16:creationId xmlns:a16="http://schemas.microsoft.com/office/drawing/2014/main" id="{28F1D416-1464-F569-BAAC-4CE3AC639CD1}"/>
-              </a:ext>
-            </a:extLst>
-          </p:cNvPr>
-          <p:cNvPicPr>
-            <a:picLocks noChangeAspect="1"/>
-          </p:cNvPicPr>
-          <p:nvPr/>
-        </p:nvPicPr>
-        <p:blipFill>
-          <a:blip r:embed="rId5">
-            <a:extLst>
-              <a:ext uri="{96DAC541-7B7A-43D3-8B79-37D633B846F1}">
-                <asvg:svgBlip xmlns:asvg="http://schemas.microsoft.com/office/drawing/2016/SVG/main" r:embed="rId6"/>
-              </a:ext>
-            </a:extLst>
-          </a:blip>
-          <a:stretch>
-            <a:fillRect/>
-          </a:stretch>
-        </p:blipFill>
-        <p:spPr>
-          <a:xfrm>
-            <a:off x="7678818" y="1219200"/>
-            <a:ext cx="914400" cy="914400"/>
-          </a:xfrm>
-          <a:prstGeom prst="rect">
-            <a:avLst/>
-          </a:prstGeom>
-        </p:spPr>
-      </p:pic>
-      <p:pic>
-        <p:nvPicPr>
-          <p:cNvPr id="14" name="Graphic 13" descr="Tick with solid fill">
-            <a:extLst>
-              <a:ext uri="{FF2B5EF4-FFF2-40B4-BE49-F238E27FC236}">
-                <a16:creationId xmlns:a16="http://schemas.microsoft.com/office/drawing/2014/main" id="{F2663517-508C-9559-F50A-E9F1B59AB837}"/>
-              </a:ext>
-            </a:extLst>
-          </p:cNvPr>
-          <p:cNvPicPr>
-            <a:picLocks noChangeAspect="1"/>
-          </p:cNvPicPr>
-          <p:nvPr/>
-        </p:nvPicPr>
-        <p:blipFill>
-          <a:blip r:embed="rId7">
-            <a:extLst>
-              <a:ext uri="{96DAC541-7B7A-43D3-8B79-37D633B846F1}">
-                <asvg:svgBlip xmlns:asvg="http://schemas.microsoft.com/office/drawing/2016/SVG/main" r:embed="rId8"/>
-              </a:ext>
-            </a:extLst>
-          </a:blip>
-          <a:stretch>
-            <a:fillRect/>
-          </a:stretch>
-        </p:blipFill>
-        <p:spPr>
-          <a:xfrm>
-            <a:off x="7793912" y="10998200"/>
-            <a:ext cx="914400" cy="914400"/>
-          </a:xfrm>
-          <a:prstGeom prst="rect">
-            <a:avLst/>
-          </a:prstGeom>
-        </p:spPr>
-      </p:pic>
-      <p:sp>
-        <p:nvSpPr>
-          <p:cNvPr id="15" name="Rectangle 14">
-            <a:extLst>
-              <a:ext uri="{FF2B5EF4-FFF2-40B4-BE49-F238E27FC236}">
-                <a16:creationId xmlns:a16="http://schemas.microsoft.com/office/drawing/2014/main" id="{3C884966-F1E0-E28C-8306-94E3476AE9EB}"/>
-              </a:ext>
-            </a:extLst>
-          </p:cNvPr>
-          <p:cNvSpPr/>
-          <p:nvPr/>
-        </p:nvSpPr>
-        <p:spPr>
-          <a:xfrm>
-            <a:off x="1462006" y="10805060"/>
-            <a:ext cx="7131212" cy="1323439"/>
-          </a:xfrm>
-          <a:prstGeom prst="rect">
-            <a:avLst/>
-          </a:prstGeom>
-          <a:noFill/>
-          <a:ln>
-            <a:noFill/>
-          </a:ln>
-        </p:spPr>
-        <p:style>
-          <a:lnRef idx="0">
-            <a:scrgbClr r="0" g="0" b="0"/>
-          </a:lnRef>
-          <a:fillRef idx="0">
-            <a:scrgbClr r="0" g="0" b="0"/>
-          </a:fillRef>
-          <a:effectRef idx="0">
-            <a:scrgbClr r="0" g="0" b="0"/>
-          </a:effectRef>
-          <a:fontRef idx="minor">
-            <a:schemeClr val="accent6"/>
-          </a:fontRef>
-        </p:style>
-        <p:txBody>
-          <a:bodyPr wrap="square" lIns="91440" tIns="45720" rIns="91440" bIns="45720">
-            <a:spAutoFit/>
-          </a:bodyPr>
-          <a:lstStyle/>
-          <a:p>
-            <a:pPr algn="ctr"/>
-            <a:r>
-              <a:rPr lang="en-GB" sz="8000" b="1" dirty="0">
-                <a:ln w="12700">
-                  <a:solidFill>
-                    <a:srgbClr val="00B050"/>
-                  </a:solidFill>
-                  <a:prstDash val="solid"/>
-                </a:ln>
-                <a:pattFill prst="pct50">
-                  <a:fgClr>
-                    <a:schemeClr val="accent1"/>
-                  </a:fgClr>
-                  <a:bgClr>
-                    <a:schemeClr val="accent1">
-                      <a:lumMod val="20000"/>
-                      <a:lumOff val="80000"/>
-                    </a:schemeClr>
-                  </a:bgClr>
-                </a:pattFill>
-                <a:effectLst>
-                  <a:outerShdw dist="38100" dir="2640000" algn="bl" rotWithShape="0">
-                    <a:schemeClr val="accent1"/>
-                  </a:outerShdw>
-                </a:effectLst>
-                <a:latin typeface="Patrick Hand" pitchFamily="2" charset="77"/>
-              </a:rPr>
-              <a:t>CLEAN CODE</a:t>
-            </a:r>
-          </a:p>
-        </p:txBody>
-      </p:sp>
-      <p:sp>
-        <p:nvSpPr>
-          <p:cNvPr id="18" name="Down Arrow 17">
-            <a:extLst>
-              <a:ext uri="{FF2B5EF4-FFF2-40B4-BE49-F238E27FC236}">
-                <a16:creationId xmlns:a16="http://schemas.microsoft.com/office/drawing/2014/main" id="{F519B709-69F6-84B3-4A2B-206F2AAA7983}"/>
-              </a:ext>
-            </a:extLst>
-          </p:cNvPr>
-          <p:cNvSpPr/>
-          <p:nvPr/>
-        </p:nvSpPr>
-        <p:spPr>
-          <a:xfrm>
-            <a:off x="3683000" y="8610600"/>
-            <a:ext cx="2921000" cy="2194460"/>
-          </a:xfrm>
-          <a:prstGeom prst="downArrow">
-            <a:avLst/>
-          </a:prstGeom>
-          <a:solidFill>
-            <a:schemeClr val="bg1"/>
-          </a:solidFill>
-          <a:ln w="31750">
-            <a:solidFill>
-              <a:schemeClr val="accent1">
-                <a:shade val="15000"/>
-              </a:schemeClr>
-            </a:solidFill>
-          </a:ln>
-        </p:spPr>
-        <p:style>
-          <a:lnRef idx="2">
-            <a:schemeClr val="accent1">
-              <a:shade val="15000"/>
-            </a:schemeClr>
-          </a:lnRef>
-          <a:fillRef idx="1">
-            <a:schemeClr val="accent1"/>
-          </a:fillRef>
-          <a:effectRef idx="0">
-            <a:schemeClr val="accent1"/>
-          </a:effectRef>
-          <a:fontRef idx="minor">
-            <a:schemeClr val="lt1"/>
-          </a:fontRef>
-        </p:style>
-        <p:txBody>
-          <a:bodyPr rtlCol="0" anchor="ctr"/>
-          <a:lstStyle/>
-          <a:p>
-            <a:pPr marL="0" algn="ctr" defTabSz="457200" rtl="0" eaLnBrk="1" latinLnBrk="0" hangingPunct="1"/>
-            <a:endParaRPr lang="en-DE" dirty="0">
-              <a:latin typeface="Patrick Hand" pitchFamily="2" charset="77"/>
-            </a:endParaRPr>
-          </a:p>
-        </p:txBody>
-      </p:sp>
-      <p:sp>
-        <p:nvSpPr>
-          <p:cNvPr id="3" name="Rectangle 2">
-            <a:extLst>
-              <a:ext uri="{FF2B5EF4-FFF2-40B4-BE49-F238E27FC236}">
-                <a16:creationId xmlns:a16="http://schemas.microsoft.com/office/drawing/2014/main" id="{0A3573D3-02FD-8867-C498-4782AE7F0917}"/>
-              </a:ext>
-            </a:extLst>
-          </p:cNvPr>
-          <p:cNvSpPr/>
-          <p:nvPr/>
-        </p:nvSpPr>
-        <p:spPr>
-          <a:xfrm>
-            <a:off x="-8208470" y="2819400"/>
-            <a:ext cx="7768473" cy="923330"/>
-          </a:xfrm>
-          <a:prstGeom prst="rect">
-            <a:avLst/>
-          </a:prstGeom>
-          <a:ln>
-            <a:solidFill>
-              <a:schemeClr val="tx1"/>
-            </a:solidFill>
-          </a:ln>
-        </p:spPr>
-        <p:style>
-          <a:lnRef idx="1">
-            <a:schemeClr val="accent6"/>
-          </a:lnRef>
-          <a:fillRef idx="2">
-            <a:schemeClr val="accent6"/>
-          </a:fillRef>
-          <a:effectRef idx="1">
-            <a:schemeClr val="accent6"/>
-          </a:effectRef>
-          <a:fontRef idx="minor">
-            <a:schemeClr val="dk1"/>
-          </a:fontRef>
-        </p:style>
-        <p:txBody>
-          <a:bodyPr wrap="none" lIns="91440" tIns="45720" rIns="91440" bIns="45720">
-            <a:spAutoFit/>
-            <a:scene3d>
-              <a:camera prst="orthographicFront"/>
-              <a:lightRig rig="soft" dir="t">
-                <a:rot lat="0" lon="0" rev="15600000"/>
-              </a:lightRig>
-            </a:scene3d>
-            <a:sp3d extrusionH="57150" prstMaterial="softEdge">
-              <a:bevelT w="25400" h="38100"/>
-            </a:sp3d>
-          </a:bodyPr>
-          <a:lstStyle/>
-          <a:p>
-            <a:pPr algn="ctr"/>
-            <a:r>
-              <a:rPr lang="en-GB" sz="5400" dirty="0">
-                <a:ln w="0"/>
-                <a:solidFill>
-                  <a:schemeClr val="tx1"/>
-                </a:solidFill>
-                <a:effectLst>
-                  <a:outerShdw blurRad="38100" dist="19050" dir="2700000" algn="tl" rotWithShape="0">
-                    <a:schemeClr val="dk1">
-                      <a:alpha val="40000"/>
-                    </a:schemeClr>
-                  </a:outerShdw>
-                </a:effectLst>
-                <a:latin typeface="Patrick Hand" pitchFamily="2" charset="77"/>
-              </a:rPr>
-              <a:t>py_002_list_comprehensions</a:t>
-            </a:r>
-            <a:endParaRPr lang="en-DE" sz="5400" dirty="0">
-              <a:ln w="0"/>
-              <a:solidFill>
-                <a:schemeClr val="tx1"/>
-              </a:solidFill>
-              <a:effectLst>
-                <a:outerShdw blurRad="38100" dist="19050" dir="2700000" algn="tl" rotWithShape="0">
-                  <a:schemeClr val="dk1">
-                    <a:alpha val="40000"/>
-                  </a:schemeClr>
-                </a:outerShdw>
-              </a:effectLst>
-            </a:endParaRPr>
-          </a:p>
-        </p:txBody>
-      </p:sp>
-    </p:spTree>
-    <p:extLst>
-      <p:ext uri="{BB962C8B-B14F-4D97-AF65-F5344CB8AC3E}">
-        <p14:creationId xmlns:p14="http://schemas.microsoft.com/office/powerpoint/2010/main" val="1367177939"/>
-      </p:ext>
-    </p:extLst>
-  </p:cSld>
-  <p:clrMapOvr>
-    <a:masterClrMapping/>
-  </p:clrMapOvr>
-</p:sld>
-</file>
-
-<file path=ppt/slides/slide30.xml><?xml version="1.0" encoding="utf-8"?>
+<file path=ppt/slides/slide31.xml><?xml version="1.0" encoding="utf-8"?>
 <p:sld xmlns:a="http://schemas.openxmlformats.org/drawingml/2006/main" xmlns:r="http://schemas.openxmlformats.org/officeDocument/2006/relationships" xmlns:p="http://schemas.openxmlformats.org/presentationml/2006/main">
   <p:cSld>
     <p:bg>
@@ -16723,7 +17076,7 @@
 </p:sld>
 </file>
 
-<file path=ppt/slides/slide31.xml><?xml version="1.0" encoding="utf-8"?>
+<file path=ppt/slides/slide32.xml><?xml version="1.0" encoding="utf-8"?>
 <p:sld xmlns:a="http://schemas.openxmlformats.org/drawingml/2006/main" xmlns:r="http://schemas.openxmlformats.org/officeDocument/2006/relationships" xmlns:p="http://schemas.openxmlformats.org/presentationml/2006/main">
   <p:cSld>
     <p:bg>
@@ -17040,7 +17393,7 @@
 </p:sld>
 </file>
 
-<file path=ppt/slides/slide32.xml><?xml version="1.0" encoding="utf-8"?>
+<file path=ppt/slides/slide33.xml><?xml version="1.0" encoding="utf-8"?>
 <p:sld xmlns:a="http://schemas.openxmlformats.org/drawingml/2006/main" xmlns:r="http://schemas.openxmlformats.org/officeDocument/2006/relationships" xmlns:p="http://schemas.openxmlformats.org/presentationml/2006/main">
   <p:cSld>
     <p:bg>
@@ -17353,7 +17706,7 @@
 </p:sld>
 </file>
 
-<file path=ppt/slides/slide33.xml><?xml version="1.0" encoding="utf-8"?>
+<file path=ppt/slides/slide34.xml><?xml version="1.0" encoding="utf-8"?>
 <p:sld xmlns:a="http://schemas.openxmlformats.org/drawingml/2006/main" xmlns:r="http://schemas.openxmlformats.org/officeDocument/2006/relationships" xmlns:p="http://schemas.openxmlformats.org/presentationml/2006/main">
   <p:cSld>
     <p:bg>
@@ -17578,7 +17931,7 @@
 </p:sld>
 </file>
 
-<file path=ppt/slides/slide34.xml><?xml version="1.0" encoding="utf-8"?>
+<file path=ppt/slides/slide35.xml><?xml version="1.0" encoding="utf-8"?>
 <p:sld xmlns:a="http://schemas.openxmlformats.org/drawingml/2006/main" xmlns:r="http://schemas.openxmlformats.org/officeDocument/2006/relationships" xmlns:p="http://schemas.openxmlformats.org/presentationml/2006/main">
   <p:cSld>
     <p:bg>
@@ -17733,8 +18086,8 @@
         </p:nvSpPr>
         <p:spPr>
           <a:xfrm>
-            <a:off x="-7857400" y="2527667"/>
-            <a:ext cx="6524543" cy="830997"/>
+            <a:off x="-10475910" y="2463702"/>
+            <a:ext cx="8132354" cy="830997"/>
           </a:xfrm>
           <a:prstGeom prst="rect">
             <a:avLst/>
@@ -17742,13 +18095,13 @@
         </p:spPr>
         <p:style>
           <a:lnRef idx="1">
-            <a:schemeClr val="accent2"/>
+            <a:schemeClr val="accent6"/>
           </a:lnRef>
           <a:fillRef idx="2">
-            <a:schemeClr val="accent2"/>
+            <a:schemeClr val="accent6"/>
           </a:fillRef>
           <a:effectRef idx="1">
-            <a:schemeClr val="accent2"/>
+            <a:schemeClr val="accent6"/>
           </a:effectRef>
           <a:fontRef idx="minor">
             <a:schemeClr val="dk1"/>
@@ -17762,17 +18115,33 @@
           <a:p>
             <a:r>
               <a:rPr lang="en-US" sz="4800" dirty="0">
+                <a:ln w="0"/>
                 <a:solidFill>
-                  <a:srgbClr val="FF0000"/>
+                  <a:schemeClr val="tx1"/>
                 </a:solidFill>
+                <a:effectLst>
+                  <a:outerShdw blurRad="38100" dist="19050" dir="2700000" algn="tl" rotWithShape="0">
+                    <a:schemeClr val="dk1">
+                      <a:alpha val="40000"/>
+                    </a:schemeClr>
+                  </a:outerShdw>
+                </a:effectLst>
                 <a:latin typeface="Patrick Hand" pitchFamily="2" charset="77"/>
               </a:rPr>
-              <a:t>vitest_001_test_your_code</a:t>
+              <a:t>Image: vitest_001_test_your_code</a:t>
             </a:r>
             <a:endParaRPr lang="en-DE" sz="4800" dirty="0">
+              <a:ln w="0"/>
               <a:solidFill>
-                <a:srgbClr val="FF0000"/>
+                <a:schemeClr val="tx1"/>
               </a:solidFill>
+              <a:effectLst>
+                <a:outerShdw blurRad="38100" dist="19050" dir="2700000" algn="tl" rotWithShape="0">
+                  <a:schemeClr val="dk1">
+                    <a:alpha val="40000"/>
+                  </a:schemeClr>
+                </a:outerShdw>
+              </a:effectLst>
               <a:latin typeface="Patrick Hand" pitchFamily="2" charset="77"/>
             </a:endParaRPr>
           </a:p>
@@ -17907,7 +18276,7 @@
 </p:sld>
 </file>
 
-<file path=ppt/slides/slide35.xml><?xml version="1.0" encoding="utf-8"?>
+<file path=ppt/slides/slide36.xml><?xml version="1.0" encoding="utf-8"?>
 <p:sld xmlns:a="http://schemas.openxmlformats.org/drawingml/2006/main" xmlns:r="http://schemas.openxmlformats.org/officeDocument/2006/relationships" xmlns:p="http://schemas.openxmlformats.org/presentationml/2006/main">
   <p:cSld>
     <p:spTree>

--- a/assets/shorts.pptx
+++ b/assets/shorts.pptx
@@ -5,7 +5,7 @@
     <p:sldMasterId id="2147483732" r:id="rId1"/>
   </p:sldMasterIdLst>
   <p:notesMasterIdLst>
-    <p:notesMasterId r:id="rId38"/>
+    <p:notesMasterId r:id="rId40"/>
   </p:notesMasterIdLst>
   <p:sldIdLst>
     <p:sldId id="263" r:id="rId2"/>
@@ -30,20 +30,22 @@
     <p:sldId id="293" r:id="rId21"/>
     <p:sldId id="294" r:id="rId22"/>
     <p:sldId id="306" r:id="rId23"/>
-    <p:sldId id="309" r:id="rId24"/>
-    <p:sldId id="296" r:id="rId25"/>
-    <p:sldId id="297" r:id="rId26"/>
-    <p:sldId id="298" r:id="rId27"/>
-    <p:sldId id="299" r:id="rId28"/>
-    <p:sldId id="300" r:id="rId29"/>
-    <p:sldId id="301" r:id="rId30"/>
-    <p:sldId id="302" r:id="rId31"/>
-    <p:sldId id="303" r:id="rId32"/>
-    <p:sldId id="304" r:id="rId33"/>
-    <p:sldId id="305" r:id="rId34"/>
-    <p:sldId id="307" r:id="rId35"/>
-    <p:sldId id="308" r:id="rId36"/>
-    <p:sldId id="282" r:id="rId37"/>
+    <p:sldId id="310" r:id="rId24"/>
+    <p:sldId id="311" r:id="rId25"/>
+    <p:sldId id="309" r:id="rId26"/>
+    <p:sldId id="296" r:id="rId27"/>
+    <p:sldId id="297" r:id="rId28"/>
+    <p:sldId id="298" r:id="rId29"/>
+    <p:sldId id="299" r:id="rId30"/>
+    <p:sldId id="300" r:id="rId31"/>
+    <p:sldId id="301" r:id="rId32"/>
+    <p:sldId id="302" r:id="rId33"/>
+    <p:sldId id="303" r:id="rId34"/>
+    <p:sldId id="304" r:id="rId35"/>
+    <p:sldId id="305" r:id="rId36"/>
+    <p:sldId id="307" r:id="rId37"/>
+    <p:sldId id="308" r:id="rId38"/>
+    <p:sldId id="282" r:id="rId39"/>
   </p:sldIdLst>
   <p:sldSz cx="10285413" cy="18288000"/>
   <p:notesSz cx="6858000" cy="9144000"/>
@@ -689,7 +691,7 @@
           <a:p>
             <a:fld id="{CEF57384-5D6E-7E42-90C4-560B39EF53DD}" type="datetimeFigureOut">
               <a:rPr lang="en-DE" smtClean="0"/>
-              <a:t>09.01.26</a:t>
+              <a:t>20.01.26</a:t>
             </a:fld>
             <a:endParaRPr lang="en-DE"/>
           </a:p>
@@ -1888,7 +1890,7 @@
             <a:fld id="{48A87A34-81AB-432B-8DAE-1953F412C126}" type="datetimeFigureOut">
               <a:rPr lang="en-US" smtClean="0"/>
               <a:pPr/>
-              <a:t>1/9/26</a:t>
+              <a:t>1/20/26</a:t>
             </a:fld>
             <a:endParaRPr lang="en-US" dirty="0"/>
           </a:p>
@@ -2058,7 +2060,7 @@
           <a:p>
             <a:fld id="{48A87A34-81AB-432B-8DAE-1953F412C126}" type="datetimeFigureOut">
               <a:rPr lang="en-US" smtClean="0"/>
-              <a:t>1/9/26</a:t>
+              <a:t>1/20/26</a:t>
             </a:fld>
             <a:endParaRPr lang="en-US" dirty="0"/>
           </a:p>
@@ -2238,7 +2240,7 @@
           <a:p>
             <a:fld id="{48A87A34-81AB-432B-8DAE-1953F412C126}" type="datetimeFigureOut">
               <a:rPr lang="en-US" smtClean="0"/>
-              <a:t>1/9/26</a:t>
+              <a:t>1/20/26</a:t>
             </a:fld>
             <a:endParaRPr lang="en-US" dirty="0"/>
           </a:p>
@@ -2471,7 +2473,7 @@
             <a:fld id="{48A87A34-81AB-432B-8DAE-1953F412C126}" type="datetimeFigureOut">
               <a:rPr lang="en-US" smtClean="0"/>
               <a:pPr/>
-              <a:t>1/9/26</a:t>
+              <a:t>1/20/26</a:t>
             </a:fld>
             <a:endParaRPr lang="en-US" dirty="0"/>
           </a:p>
@@ -2773,7 +2775,7 @@
           <a:p>
             <a:fld id="{48A87A34-81AB-432B-8DAE-1953F412C126}" type="datetimeFigureOut">
               <a:rPr lang="en-US" smtClean="0"/>
-              <a:t>1/9/26</a:t>
+              <a:t>1/20/26</a:t>
             </a:fld>
             <a:endParaRPr lang="en-US" dirty="0"/>
           </a:p>
@@ -3005,7 +3007,7 @@
           <a:p>
             <a:fld id="{48A87A34-81AB-432B-8DAE-1953F412C126}" type="datetimeFigureOut">
               <a:rPr lang="en-US" smtClean="0"/>
-              <a:t>1/9/26</a:t>
+              <a:t>1/20/26</a:t>
             </a:fld>
             <a:endParaRPr lang="en-US" dirty="0"/>
           </a:p>
@@ -3372,7 +3374,7 @@
           <a:p>
             <a:fld id="{48A87A34-81AB-432B-8DAE-1953F412C126}" type="datetimeFigureOut">
               <a:rPr lang="en-US" smtClean="0"/>
-              <a:t>1/9/26</a:t>
+              <a:t>1/20/26</a:t>
             </a:fld>
             <a:endParaRPr lang="en-US" dirty="0"/>
           </a:p>
@@ -3490,7 +3492,7 @@
           <a:p>
             <a:fld id="{48A87A34-81AB-432B-8DAE-1953F412C126}" type="datetimeFigureOut">
               <a:rPr lang="en-US" smtClean="0"/>
-              <a:t>1/9/26</a:t>
+              <a:t>1/20/26</a:t>
             </a:fld>
             <a:endParaRPr lang="en-US" dirty="0"/>
           </a:p>
@@ -3585,7 +3587,7 @@
           <a:p>
             <a:fld id="{48A87A34-81AB-432B-8DAE-1953F412C126}" type="datetimeFigureOut">
               <a:rPr lang="en-US" smtClean="0"/>
-              <a:t>1/9/26</a:t>
+              <a:t>1/20/26</a:t>
             </a:fld>
             <a:endParaRPr lang="en-US" dirty="0"/>
           </a:p>
@@ -3862,7 +3864,7 @@
           <a:p>
             <a:fld id="{48A87A34-81AB-432B-8DAE-1953F412C126}" type="datetimeFigureOut">
               <a:rPr lang="en-US" smtClean="0"/>
-              <a:t>1/9/26</a:t>
+              <a:t>1/20/26</a:t>
             </a:fld>
             <a:endParaRPr lang="en-US" dirty="0"/>
           </a:p>
@@ -4119,7 +4121,7 @@
           <a:p>
             <a:fld id="{48A87A34-81AB-432B-8DAE-1953F412C126}" type="datetimeFigureOut">
               <a:rPr lang="en-US" smtClean="0"/>
-              <a:t>1/9/26</a:t>
+              <a:t>1/20/26</a:t>
             </a:fld>
             <a:endParaRPr lang="en-US" dirty="0"/>
           </a:p>
@@ -4333,7 +4335,7 @@
             <a:fld id="{48A87A34-81AB-432B-8DAE-1953F412C126}" type="datetimeFigureOut">
               <a:rPr lang="en-US" smtClean="0"/>
               <a:pPr/>
-              <a:t>1/9/26</a:t>
+              <a:t>1/20/26</a:t>
             </a:fld>
             <a:endParaRPr lang="en-US" dirty="0"/>
           </a:p>
@@ -12838,6 +12840,776 @@
   <p:cSld>
     <p:bg>
       <p:bgPr>
+        <a:pattFill prst="dashVert">
+          <a:fgClr>
+            <a:srgbClr val="FFFF00"/>
+          </a:fgClr>
+          <a:bgClr>
+            <a:schemeClr val="bg1"/>
+          </a:bgClr>
+        </a:pattFill>
+        <a:effectLst/>
+      </p:bgPr>
+    </p:bg>
+    <p:spTree>
+      <p:nvGrpSpPr>
+        <p:cNvPr id="1" name="">
+          <a:extLst>
+            <a:ext uri="{FF2B5EF4-FFF2-40B4-BE49-F238E27FC236}">
+              <a16:creationId xmlns:a16="http://schemas.microsoft.com/office/drawing/2014/main" id="{BA022639-4272-05CB-2492-F553AE737A9C}"/>
+            </a:ext>
+          </a:extLst>
+        </p:cNvPr>
+        <p:cNvGrpSpPr/>
+        <p:nvPr/>
+      </p:nvGrpSpPr>
+      <p:grpSpPr>
+        <a:xfrm>
+          <a:off x="0" y="0"/>
+          <a:ext cx="0" cy="0"/>
+          <a:chOff x="0" y="0"/>
+          <a:chExt cx="0" cy="0"/>
+        </a:xfrm>
+      </p:grpSpPr>
+      <p:sp>
+        <p:nvSpPr>
+          <p:cNvPr id="4" name="TextBox 3">
+            <a:extLst>
+              <a:ext uri="{FF2B5EF4-FFF2-40B4-BE49-F238E27FC236}">
+                <a16:creationId xmlns:a16="http://schemas.microsoft.com/office/drawing/2014/main" id="{9735B1D9-D160-7689-0835-C93F40878D70}"/>
+              </a:ext>
+            </a:extLst>
+          </p:cNvPr>
+          <p:cNvSpPr txBox="1"/>
+          <p:nvPr/>
+        </p:nvSpPr>
+        <p:spPr>
+          <a:xfrm>
+            <a:off x="223306" y="2377920"/>
+            <a:ext cx="9838800" cy="1189726"/>
+          </a:xfrm>
+          <a:prstGeom prst="rect">
+            <a:avLst/>
+          </a:prstGeom>
+          <a:gradFill flip="none" rotWithShape="1">
+            <a:gsLst>
+              <a:gs pos="0">
+                <a:schemeClr val="accent4">
+                  <a:lumMod val="67000"/>
+                </a:schemeClr>
+              </a:gs>
+              <a:gs pos="48000">
+                <a:schemeClr val="accent4">
+                  <a:lumMod val="97000"/>
+                  <a:lumOff val="3000"/>
+                </a:schemeClr>
+              </a:gs>
+              <a:gs pos="100000">
+                <a:schemeClr val="accent4">
+                  <a:lumMod val="60000"/>
+                  <a:lumOff val="40000"/>
+                </a:schemeClr>
+              </a:gs>
+            </a:gsLst>
+            <a:lin ang="16200000" scaled="1"/>
+            <a:tileRect/>
+          </a:gradFill>
+          <a:ln>
+            <a:noFill/>
+          </a:ln>
+        </p:spPr>
+        <p:style>
+          <a:lnRef idx="0">
+            <a:scrgbClr r="0" g="0" b="0"/>
+          </a:lnRef>
+          <a:fillRef idx="0">
+            <a:scrgbClr r="0" g="0" b="0"/>
+          </a:fillRef>
+          <a:effectRef idx="0">
+            <a:scrgbClr r="0" g="0" b="0"/>
+          </a:effectRef>
+          <a:fontRef idx="minor">
+            <a:schemeClr val="lt1"/>
+          </a:fontRef>
+        </p:style>
+        <p:txBody>
+          <a:bodyPr wrap="square" rtlCol="0">
+            <a:noAutofit/>
+          </a:bodyPr>
+          <a:lstStyle/>
+          <a:p>
+            <a:pPr marL="0" algn="ctr" defTabSz="457200" rtl="0" eaLnBrk="1" latinLnBrk="0" hangingPunct="1"/>
+            <a:r>
+              <a:rPr lang="en-US" sz="6000" b="1" dirty="0">
+                <a:ln w="0"/>
+                <a:solidFill>
+                  <a:schemeClr val="tx1"/>
+                </a:solidFill>
+                <a:effectLst>
+                  <a:outerShdw blurRad="38100" dist="19050" dir="2700000" algn="tl" rotWithShape="0">
+                    <a:schemeClr val="dk1">
+                      <a:alpha val="40000"/>
+                    </a:schemeClr>
+                  </a:outerShdw>
+                </a:effectLst>
+                <a:latin typeface="+mj-lt"/>
+              </a:rPr>
+              <a:t>Stop Nested If-Else</a:t>
+            </a:r>
+            <a:endParaRPr lang="en-GB" sz="1600" b="1" dirty="0">
+              <a:ln w="0"/>
+              <a:solidFill>
+                <a:schemeClr val="tx1"/>
+              </a:solidFill>
+              <a:effectLst>
+                <a:outerShdw blurRad="38100" dist="19050" dir="2700000" algn="tl" rotWithShape="0">
+                  <a:schemeClr val="dk1">
+                    <a:alpha val="40000"/>
+                  </a:schemeClr>
+                </a:outerShdw>
+              </a:effectLst>
+              <a:latin typeface="+mj-lt"/>
+            </a:endParaRPr>
+          </a:p>
+        </p:txBody>
+      </p:sp>
+      <p:pic>
+        <p:nvPicPr>
+          <p:cNvPr id="5" name="Picture 4">
+            <a:extLst>
+              <a:ext uri="{FF2B5EF4-FFF2-40B4-BE49-F238E27FC236}">
+                <a16:creationId xmlns:a16="http://schemas.microsoft.com/office/drawing/2014/main" id="{69D203E7-C11A-C84C-E096-19757866AB15}"/>
+              </a:ext>
+            </a:extLst>
+          </p:cNvPr>
+          <p:cNvPicPr>
+            <a:picLocks noChangeAspect="1"/>
+          </p:cNvPicPr>
+          <p:nvPr/>
+        </p:nvPicPr>
+        <p:blipFill>
+          <a:blip r:embed="rId2"/>
+          <a:stretch>
+            <a:fillRect/>
+          </a:stretch>
+        </p:blipFill>
+        <p:spPr>
+          <a:xfrm>
+            <a:off x="290127" y="2440699"/>
+            <a:ext cx="1063167" cy="1063167"/>
+          </a:xfrm>
+          <a:prstGeom prst="rect">
+            <a:avLst/>
+          </a:prstGeom>
+        </p:spPr>
+      </p:pic>
+      <p:sp>
+        <p:nvSpPr>
+          <p:cNvPr id="13" name="TextBox 12">
+            <a:extLst>
+              <a:ext uri="{FF2B5EF4-FFF2-40B4-BE49-F238E27FC236}">
+                <a16:creationId xmlns:a16="http://schemas.microsoft.com/office/drawing/2014/main" id="{616324E3-C532-2DD3-3D6B-4A47E6319854}"/>
+              </a:ext>
+            </a:extLst>
+          </p:cNvPr>
+          <p:cNvSpPr txBox="1"/>
+          <p:nvPr/>
+        </p:nvSpPr>
+        <p:spPr>
+          <a:xfrm>
+            <a:off x="0" y="16936102"/>
+            <a:ext cx="10285412" cy="1015663"/>
+          </a:xfrm>
+          <a:prstGeom prst="rect">
+            <a:avLst/>
+          </a:prstGeom>
+          <a:noFill/>
+        </p:spPr>
+        <p:txBody>
+          <a:bodyPr wrap="square" rtlCol="0">
+            <a:spAutoFit/>
+          </a:bodyPr>
+          <a:lstStyle/>
+          <a:p>
+            <a:pPr algn="ctr"/>
+            <a:r>
+              <a:rPr lang="en-GB" sz="6000" dirty="0">
+                <a:ln w="0"/>
+                <a:solidFill>
+                  <a:srgbClr val="C00000"/>
+                </a:solidFill>
+                <a:effectLst>
+                  <a:outerShdw blurRad="38100" dist="19050" dir="2700000" algn="tl" rotWithShape="0">
+                    <a:schemeClr val="dk1">
+                      <a:alpha val="40000"/>
+                    </a:schemeClr>
+                  </a:outerShdw>
+                </a:effectLst>
+                <a:latin typeface="Patrick Hand" pitchFamily="2" charset="77"/>
+              </a:rPr>
+              <a:t>Flatten your code by returning early</a:t>
+            </a:r>
+            <a:endParaRPr lang="en-DE" sz="6000" dirty="0">
+              <a:ln w="0"/>
+              <a:solidFill>
+                <a:srgbClr val="C00000"/>
+              </a:solidFill>
+              <a:effectLst>
+                <a:outerShdw blurRad="38100" dist="19050" dir="2700000" algn="tl" rotWithShape="0">
+                  <a:schemeClr val="dk1">
+                    <a:alpha val="40000"/>
+                  </a:schemeClr>
+                </a:outerShdw>
+              </a:effectLst>
+              <a:latin typeface="Patrick Hand" pitchFamily="2" charset="77"/>
+            </a:endParaRPr>
+          </a:p>
+        </p:txBody>
+      </p:sp>
+      <p:cxnSp>
+        <p:nvCxnSpPr>
+          <p:cNvPr id="17" name="Straight Connector 16">
+            <a:extLst>
+              <a:ext uri="{FF2B5EF4-FFF2-40B4-BE49-F238E27FC236}">
+                <a16:creationId xmlns:a16="http://schemas.microsoft.com/office/drawing/2014/main" id="{0A04A800-EA81-6142-3243-5E7FA473DB13}"/>
+              </a:ext>
+            </a:extLst>
+          </p:cNvPr>
+          <p:cNvCxnSpPr>
+            <a:cxnSpLocks/>
+          </p:cNvCxnSpPr>
+          <p:nvPr/>
+        </p:nvCxnSpPr>
+        <p:spPr>
+          <a:xfrm>
+            <a:off x="223579" y="10295203"/>
+            <a:ext cx="9838255" cy="0"/>
+          </a:xfrm>
+          <a:prstGeom prst="line">
+            <a:avLst/>
+          </a:prstGeom>
+          <a:ln w="38100">
+            <a:solidFill>
+              <a:schemeClr val="bg1"/>
+            </a:solidFill>
+            <a:headEnd type="none"/>
+            <a:tailEnd type="none" w="lg" len="lg"/>
+          </a:ln>
+        </p:spPr>
+        <p:style>
+          <a:lnRef idx="1">
+            <a:schemeClr val="accent1"/>
+          </a:lnRef>
+          <a:fillRef idx="0">
+            <a:schemeClr val="accent1"/>
+          </a:fillRef>
+          <a:effectRef idx="0">
+            <a:schemeClr val="accent1"/>
+          </a:effectRef>
+          <a:fontRef idx="minor">
+            <a:schemeClr val="tx1"/>
+          </a:fontRef>
+        </p:style>
+      </p:cxnSp>
+      <p:pic>
+        <p:nvPicPr>
+          <p:cNvPr id="18" name="Graphic 17" descr="Shield Tick with solid fill">
+            <a:extLst>
+              <a:ext uri="{FF2B5EF4-FFF2-40B4-BE49-F238E27FC236}">
+                <a16:creationId xmlns:a16="http://schemas.microsoft.com/office/drawing/2014/main" id="{1147C8A3-1665-E8A9-5854-B0DA470BB9BB}"/>
+              </a:ext>
+            </a:extLst>
+          </p:cNvPr>
+          <p:cNvPicPr>
+            <a:picLocks noChangeAspect="1"/>
+          </p:cNvPicPr>
+          <p:nvPr/>
+        </p:nvPicPr>
+        <p:blipFill>
+          <a:blip r:embed="rId3">
+            <a:extLst>
+              <a:ext uri="{96DAC541-7B7A-43D3-8B79-37D633B846F1}">
+                <asvg:svgBlip xmlns:asvg="http://schemas.microsoft.com/office/drawing/2016/SVG/main" r:embed="rId4"/>
+              </a:ext>
+            </a:extLst>
+          </a:blip>
+          <a:stretch>
+            <a:fillRect/>
+          </a:stretch>
+        </p:blipFill>
+        <p:spPr>
+          <a:xfrm>
+            <a:off x="7689278" y="12614445"/>
+            <a:ext cx="914400" cy="914400"/>
+          </a:xfrm>
+          <a:prstGeom prst="rect">
+            <a:avLst/>
+          </a:prstGeom>
+        </p:spPr>
+      </p:pic>
+      <p:pic>
+        <p:nvPicPr>
+          <p:cNvPr id="19" name="Graphic 18" descr="Close with solid fill">
+            <a:extLst>
+              <a:ext uri="{FF2B5EF4-FFF2-40B4-BE49-F238E27FC236}">
+                <a16:creationId xmlns:a16="http://schemas.microsoft.com/office/drawing/2014/main" id="{8AA43972-6285-B821-61AB-42CD22595956}"/>
+              </a:ext>
+            </a:extLst>
+          </p:cNvPr>
+          <p:cNvPicPr>
+            <a:picLocks noChangeAspect="1"/>
+          </p:cNvPicPr>
+          <p:nvPr/>
+        </p:nvPicPr>
+        <p:blipFill>
+          <a:blip r:embed="rId5">
+            <a:extLst>
+              <a:ext uri="{96DAC541-7B7A-43D3-8B79-37D633B846F1}">
+                <asvg:svgBlip xmlns:asvg="http://schemas.microsoft.com/office/drawing/2016/SVG/main" r:embed="rId6"/>
+              </a:ext>
+            </a:extLst>
+          </a:blip>
+          <a:stretch>
+            <a:fillRect/>
+          </a:stretch>
+        </p:blipFill>
+        <p:spPr>
+          <a:xfrm>
+            <a:off x="7689278" y="5989315"/>
+            <a:ext cx="914400" cy="914400"/>
+          </a:xfrm>
+          <a:prstGeom prst="rect">
+            <a:avLst/>
+          </a:prstGeom>
+        </p:spPr>
+      </p:pic>
+      <p:sp>
+        <p:nvSpPr>
+          <p:cNvPr id="25" name="TextBox 24">
+            <a:extLst>
+              <a:ext uri="{FF2B5EF4-FFF2-40B4-BE49-F238E27FC236}">
+                <a16:creationId xmlns:a16="http://schemas.microsoft.com/office/drawing/2014/main" id="{D9ADCC63-695E-7B85-F85A-397F27C85199}"/>
+              </a:ext>
+            </a:extLst>
+          </p:cNvPr>
+          <p:cNvSpPr txBox="1"/>
+          <p:nvPr/>
+        </p:nvSpPr>
+        <p:spPr>
+          <a:xfrm>
+            <a:off x="-8470937" y="2490606"/>
+            <a:ext cx="6793848" cy="830997"/>
+          </a:xfrm>
+          <a:prstGeom prst="rect">
+            <a:avLst/>
+          </a:prstGeom>
+        </p:spPr>
+        <p:style>
+          <a:lnRef idx="1">
+            <a:schemeClr val="accent2"/>
+          </a:lnRef>
+          <a:fillRef idx="2">
+            <a:schemeClr val="accent2"/>
+          </a:fillRef>
+          <a:effectRef idx="1">
+            <a:schemeClr val="accent2"/>
+          </a:effectRef>
+          <a:fontRef idx="minor">
+            <a:schemeClr val="dk1"/>
+          </a:fontRef>
+        </p:style>
+        <p:txBody>
+          <a:bodyPr wrap="none" rtlCol="0">
+            <a:spAutoFit/>
+          </a:bodyPr>
+          <a:lstStyle/>
+          <a:p>
+            <a:r>
+              <a:rPr lang="en-US" sz="4800" dirty="0">
+                <a:solidFill>
+                  <a:srgbClr val="FF0000"/>
+                </a:solidFill>
+                <a:latin typeface="Patrick Hand" pitchFamily="2" charset="77"/>
+              </a:rPr>
+              <a:t>py_022_clean_if_statement</a:t>
+            </a:r>
+            <a:endParaRPr lang="en-DE" sz="4800" dirty="0">
+              <a:solidFill>
+                <a:srgbClr val="FF0000"/>
+              </a:solidFill>
+              <a:latin typeface="Patrick Hand" pitchFamily="2" charset="77"/>
+            </a:endParaRPr>
+          </a:p>
+        </p:txBody>
+      </p:sp>
+    </p:spTree>
+    <p:extLst>
+      <p:ext uri="{BB962C8B-B14F-4D97-AF65-F5344CB8AC3E}">
+        <p14:creationId xmlns:p14="http://schemas.microsoft.com/office/powerpoint/2010/main" val="1353893340"/>
+      </p:ext>
+    </p:extLst>
+  </p:cSld>
+  <p:clrMapOvr>
+    <a:masterClrMapping/>
+  </p:clrMapOvr>
+</p:sld>
+</file>
+
+<file path=ppt/slides/slide24.xml><?xml version="1.0" encoding="utf-8"?>
+<p:sld xmlns:a="http://schemas.openxmlformats.org/drawingml/2006/main" xmlns:r="http://schemas.openxmlformats.org/officeDocument/2006/relationships" xmlns:p="http://schemas.openxmlformats.org/presentationml/2006/main">
+  <p:cSld>
+    <p:bg>
+      <p:bgPr>
+        <a:blipFill>
+          <a:blip r:embed="rId2"/>
+          <a:tile tx="0" ty="0" sx="100000" sy="100000" flip="none" algn="tl"/>
+        </a:blipFill>
+        <a:effectLst/>
+      </p:bgPr>
+    </p:bg>
+    <p:spTree>
+      <p:nvGrpSpPr>
+        <p:cNvPr id="1" name="">
+          <a:extLst>
+            <a:ext uri="{FF2B5EF4-FFF2-40B4-BE49-F238E27FC236}">
+              <a16:creationId xmlns:a16="http://schemas.microsoft.com/office/drawing/2014/main" id="{98F26F6C-D227-4DE8-9703-E15F54EBF454}"/>
+            </a:ext>
+          </a:extLst>
+        </p:cNvPr>
+        <p:cNvGrpSpPr/>
+        <p:nvPr/>
+      </p:nvGrpSpPr>
+      <p:grpSpPr>
+        <a:xfrm>
+          <a:off x="0" y="0"/>
+          <a:ext cx="0" cy="0"/>
+          <a:chOff x="0" y="0"/>
+          <a:chExt cx="0" cy="0"/>
+        </a:xfrm>
+      </p:grpSpPr>
+      <p:pic>
+        <p:nvPicPr>
+          <p:cNvPr id="27" name="Picture 26">
+            <a:extLst>
+              <a:ext uri="{FF2B5EF4-FFF2-40B4-BE49-F238E27FC236}">
+                <a16:creationId xmlns:a16="http://schemas.microsoft.com/office/drawing/2014/main" id="{D0715138-4454-0073-6B94-B6FDC353190A}"/>
+              </a:ext>
+            </a:extLst>
+          </p:cNvPr>
+          <p:cNvPicPr>
+            <a:picLocks noChangeAspect="1"/>
+          </p:cNvPicPr>
+          <p:nvPr/>
+        </p:nvPicPr>
+        <p:blipFill rotWithShape="1">
+          <a:blip r:embed="rId3"/>
+          <a:srcRect l="20480" t="18148" r="13247" b="17325"/>
+          <a:stretch>
+            <a:fillRect/>
+          </a:stretch>
+        </p:blipFill>
+        <p:spPr>
+          <a:xfrm>
+            <a:off x="231312" y="3637723"/>
+            <a:ext cx="9822787" cy="10391790"/>
+          </a:xfrm>
+          <a:prstGeom prst="rect">
+            <a:avLst/>
+          </a:prstGeom>
+          <a:ln w="12700">
+            <a:solidFill>
+              <a:schemeClr val="bg1"/>
+            </a:solidFill>
+          </a:ln>
+        </p:spPr>
+      </p:pic>
+      <p:sp>
+        <p:nvSpPr>
+          <p:cNvPr id="4" name="TextBox 3">
+            <a:extLst>
+              <a:ext uri="{FF2B5EF4-FFF2-40B4-BE49-F238E27FC236}">
+                <a16:creationId xmlns:a16="http://schemas.microsoft.com/office/drawing/2014/main" id="{CC15B431-076A-5F66-8FB9-F09D56C7CEDD}"/>
+              </a:ext>
+            </a:extLst>
+          </p:cNvPr>
+          <p:cNvSpPr txBox="1"/>
+          <p:nvPr/>
+        </p:nvSpPr>
+        <p:spPr>
+          <a:xfrm>
+            <a:off x="223306" y="2377920"/>
+            <a:ext cx="9838800" cy="1189726"/>
+          </a:xfrm>
+          <a:prstGeom prst="rect">
+            <a:avLst/>
+          </a:prstGeom>
+          <a:ln>
+            <a:solidFill>
+              <a:schemeClr val="bg1"/>
+            </a:solidFill>
+          </a:ln>
+        </p:spPr>
+        <p:style>
+          <a:lnRef idx="0">
+            <a:schemeClr val="accent5"/>
+          </a:lnRef>
+          <a:fillRef idx="3">
+            <a:schemeClr val="accent5"/>
+          </a:fillRef>
+          <a:effectRef idx="3">
+            <a:schemeClr val="accent5"/>
+          </a:effectRef>
+          <a:fontRef idx="minor">
+            <a:schemeClr val="lt1"/>
+          </a:fontRef>
+        </p:style>
+        <p:txBody>
+          <a:bodyPr wrap="square" rtlCol="0">
+            <a:noAutofit/>
+          </a:bodyPr>
+          <a:lstStyle/>
+          <a:p>
+            <a:pPr marL="0" algn="ctr" defTabSz="457200" rtl="0" eaLnBrk="1" latinLnBrk="0" hangingPunct="1"/>
+            <a:r>
+              <a:rPr lang="en-US" sz="6000" b="1" dirty="0">
+                <a:ln w="0"/>
+                <a:solidFill>
+                  <a:schemeClr val="tx1"/>
+                </a:solidFill>
+                <a:effectLst>
+                  <a:outerShdw blurRad="38100" dist="19050" dir="2700000" algn="tl" rotWithShape="0">
+                    <a:schemeClr val="dk1">
+                      <a:alpha val="40000"/>
+                    </a:schemeClr>
+                  </a:outerShdw>
+                </a:effectLst>
+                <a:latin typeface="+mj-lt"/>
+              </a:rPr>
+              <a:t>lambda function</a:t>
+            </a:r>
+            <a:endParaRPr lang="en-GB" sz="1600" b="1" dirty="0">
+              <a:ln w="0"/>
+              <a:solidFill>
+                <a:schemeClr val="tx1"/>
+              </a:solidFill>
+              <a:effectLst>
+                <a:outerShdw blurRad="38100" dist="19050" dir="2700000" algn="tl" rotWithShape="0">
+                  <a:schemeClr val="dk1">
+                    <a:alpha val="40000"/>
+                  </a:schemeClr>
+                </a:outerShdw>
+              </a:effectLst>
+              <a:latin typeface="+mj-lt"/>
+            </a:endParaRPr>
+          </a:p>
+        </p:txBody>
+      </p:sp>
+      <p:pic>
+        <p:nvPicPr>
+          <p:cNvPr id="5" name="Picture 4">
+            <a:extLst>
+              <a:ext uri="{FF2B5EF4-FFF2-40B4-BE49-F238E27FC236}">
+                <a16:creationId xmlns:a16="http://schemas.microsoft.com/office/drawing/2014/main" id="{5CB5263E-6347-2F36-424A-BF26D026D950}"/>
+              </a:ext>
+            </a:extLst>
+          </p:cNvPr>
+          <p:cNvPicPr>
+            <a:picLocks noChangeAspect="1"/>
+          </p:cNvPicPr>
+          <p:nvPr/>
+        </p:nvPicPr>
+        <p:blipFill>
+          <a:blip r:embed="rId4"/>
+          <a:stretch>
+            <a:fillRect/>
+          </a:stretch>
+        </p:blipFill>
+        <p:spPr>
+          <a:xfrm>
+            <a:off x="305222" y="2440699"/>
+            <a:ext cx="1063167" cy="1063167"/>
+          </a:xfrm>
+          <a:prstGeom prst="rect">
+            <a:avLst/>
+          </a:prstGeom>
+        </p:spPr>
+      </p:pic>
+      <p:sp>
+        <p:nvSpPr>
+          <p:cNvPr id="13" name="TextBox 12">
+            <a:extLst>
+              <a:ext uri="{FF2B5EF4-FFF2-40B4-BE49-F238E27FC236}">
+                <a16:creationId xmlns:a16="http://schemas.microsoft.com/office/drawing/2014/main" id="{AE227B43-6F2C-EBC9-5B3C-0DD1D9227AEC}"/>
+              </a:ext>
+            </a:extLst>
+          </p:cNvPr>
+          <p:cNvSpPr txBox="1"/>
+          <p:nvPr/>
+        </p:nvSpPr>
+        <p:spPr>
+          <a:xfrm>
+            <a:off x="223306" y="14120016"/>
+            <a:ext cx="9838800" cy="2308324"/>
+          </a:xfrm>
+          <a:prstGeom prst="rect">
+            <a:avLst/>
+          </a:prstGeom>
+          <a:noFill/>
+        </p:spPr>
+        <p:txBody>
+          <a:bodyPr wrap="square" rtlCol="0">
+            <a:spAutoFit/>
+          </a:bodyPr>
+          <a:lstStyle/>
+          <a:p>
+            <a:pPr algn="ctr"/>
+            <a:r>
+              <a:rPr lang="en-GB" sz="7200" b="1" dirty="0">
+                <a:ln w="10160">
+                  <a:solidFill>
+                    <a:schemeClr val="accent5"/>
+                  </a:solidFill>
+                  <a:prstDash val="solid"/>
+                </a:ln>
+                <a:solidFill>
+                  <a:srgbClr val="FFFFFF"/>
+                </a:solidFill>
+                <a:effectLst>
+                  <a:outerShdw blurRad="38100" dist="22860" dir="5400000" algn="tl" rotWithShape="0">
+                    <a:srgbClr val="000000">
+                      <a:alpha val="30000"/>
+                    </a:srgbClr>
+                  </a:outerShdw>
+                </a:effectLst>
+                <a:latin typeface="Patrick Hand" pitchFamily="2" charset="77"/>
+              </a:rPr>
+              <a:t>A lambda function is a small anonymous function.</a:t>
+            </a:r>
+          </a:p>
+        </p:txBody>
+      </p:sp>
+      <p:cxnSp>
+        <p:nvCxnSpPr>
+          <p:cNvPr id="17" name="Straight Connector 16">
+            <a:extLst>
+              <a:ext uri="{FF2B5EF4-FFF2-40B4-BE49-F238E27FC236}">
+                <a16:creationId xmlns:a16="http://schemas.microsoft.com/office/drawing/2014/main" id="{3B9785E9-B110-9D2F-A7F9-D4623A1BA6B4}"/>
+              </a:ext>
+            </a:extLst>
+          </p:cNvPr>
+          <p:cNvCxnSpPr>
+            <a:cxnSpLocks/>
+          </p:cNvCxnSpPr>
+          <p:nvPr/>
+        </p:nvCxnSpPr>
+        <p:spPr>
+          <a:xfrm>
+            <a:off x="215845" y="8768765"/>
+            <a:ext cx="9838255" cy="0"/>
+          </a:xfrm>
+          <a:prstGeom prst="line">
+            <a:avLst/>
+          </a:prstGeom>
+          <a:ln w="38100">
+            <a:solidFill>
+              <a:schemeClr val="bg1"/>
+            </a:solidFill>
+            <a:headEnd type="none"/>
+            <a:tailEnd type="none" w="lg" len="lg"/>
+          </a:ln>
+        </p:spPr>
+        <p:style>
+          <a:lnRef idx="1">
+            <a:schemeClr val="accent1"/>
+          </a:lnRef>
+          <a:fillRef idx="0">
+            <a:schemeClr val="accent1"/>
+          </a:fillRef>
+          <a:effectRef idx="0">
+            <a:schemeClr val="accent1"/>
+          </a:effectRef>
+          <a:fontRef idx="minor">
+            <a:schemeClr val="tx1"/>
+          </a:fontRef>
+        </p:style>
+      </p:cxnSp>
+      <p:sp>
+        <p:nvSpPr>
+          <p:cNvPr id="25" name="TextBox 24">
+            <a:extLst>
+              <a:ext uri="{FF2B5EF4-FFF2-40B4-BE49-F238E27FC236}">
+                <a16:creationId xmlns:a16="http://schemas.microsoft.com/office/drawing/2014/main" id="{92D1127E-1882-5BED-9C9E-FCE9E336B2DB}"/>
+              </a:ext>
+            </a:extLst>
+          </p:cNvPr>
+          <p:cNvSpPr txBox="1"/>
+          <p:nvPr/>
+        </p:nvSpPr>
+        <p:spPr>
+          <a:xfrm>
+            <a:off x="-8470937" y="2490606"/>
+            <a:ext cx="3809056" cy="830997"/>
+          </a:xfrm>
+          <a:prstGeom prst="rect">
+            <a:avLst/>
+          </a:prstGeom>
+        </p:spPr>
+        <p:style>
+          <a:lnRef idx="1">
+            <a:schemeClr val="accent2"/>
+          </a:lnRef>
+          <a:fillRef idx="2">
+            <a:schemeClr val="accent2"/>
+          </a:fillRef>
+          <a:effectRef idx="1">
+            <a:schemeClr val="accent2"/>
+          </a:effectRef>
+          <a:fontRef idx="minor">
+            <a:schemeClr val="dk1"/>
+          </a:fontRef>
+        </p:style>
+        <p:txBody>
+          <a:bodyPr wrap="none" rtlCol="0">
+            <a:spAutoFit/>
+          </a:bodyPr>
+          <a:lstStyle/>
+          <a:p>
+            <a:r>
+              <a:rPr lang="en-US" sz="4800" dirty="0">
+                <a:solidFill>
+                  <a:srgbClr val="FF0000"/>
+                </a:solidFill>
+                <a:latin typeface="Patrick Hand" pitchFamily="2" charset="77"/>
+              </a:rPr>
+              <a:t>py_023_lambda</a:t>
+            </a:r>
+            <a:endParaRPr lang="en-DE" sz="4800" dirty="0">
+              <a:solidFill>
+                <a:srgbClr val="FF0000"/>
+              </a:solidFill>
+              <a:latin typeface="Patrick Hand" pitchFamily="2" charset="77"/>
+            </a:endParaRPr>
+          </a:p>
+        </p:txBody>
+      </p:sp>
+    </p:spTree>
+    <p:extLst>
+      <p:ext uri="{BB962C8B-B14F-4D97-AF65-F5344CB8AC3E}">
+        <p14:creationId xmlns:p14="http://schemas.microsoft.com/office/powerpoint/2010/main" val="1482429770"/>
+      </p:ext>
+    </p:extLst>
+  </p:cSld>
+  <p:clrMapOvr>
+    <a:masterClrMapping/>
+  </p:clrMapOvr>
+</p:sld>
+</file>
+
+<file path=ppt/slides/slide25.xml><?xml version="1.0" encoding="utf-8"?>
+<p:sld xmlns:a="http://schemas.openxmlformats.org/drawingml/2006/main" xmlns:r="http://schemas.openxmlformats.org/officeDocument/2006/relationships" xmlns:p="http://schemas.openxmlformats.org/presentationml/2006/main">
+  <p:cSld>
+    <p:bg>
+      <p:bgPr>
         <a:blipFill>
           <a:blip r:embed="rId2"/>
           <a:tile tx="0" ty="0" sx="100000" sy="100000" flip="none" algn="tl"/>
@@ -13185,7 +13957,7 @@
 </p:sld>
 </file>
 
-<file path=ppt/slides/slide24.xml><?xml version="1.0" encoding="utf-8"?>
+<file path=ppt/slides/slide26.xml><?xml version="1.0" encoding="utf-8"?>
 <p:sld xmlns:a="http://schemas.openxmlformats.org/drawingml/2006/main" xmlns:r="http://schemas.openxmlformats.org/officeDocument/2006/relationships" xmlns:p="http://schemas.openxmlformats.org/presentationml/2006/main">
   <p:cSld>
     <p:bg>
@@ -13716,7 +14488,7 @@
 </p:sld>
 </file>
 
-<file path=ppt/slides/slide25.xml><?xml version="1.0" encoding="utf-8"?>
+<file path=ppt/slides/slide27.xml><?xml version="1.0" encoding="utf-8"?>
 <p:sld xmlns:a="http://schemas.openxmlformats.org/drawingml/2006/main" xmlns:r="http://schemas.openxmlformats.org/officeDocument/2006/relationships" xmlns:p="http://schemas.openxmlformats.org/presentationml/2006/main">
   <p:cSld>
     <p:bg>
@@ -14221,7 +14993,7 @@
 </p:sld>
 </file>
 
-<file path=ppt/slides/slide26.xml><?xml version="1.0" encoding="utf-8"?>
+<file path=ppt/slides/slide28.xml><?xml version="1.0" encoding="utf-8"?>
 <p:sld xmlns:a="http://schemas.openxmlformats.org/drawingml/2006/main" xmlns:r="http://schemas.openxmlformats.org/officeDocument/2006/relationships" xmlns:p="http://schemas.openxmlformats.org/presentationml/2006/main">
   <p:cSld>
     <p:bg>
@@ -14676,7 +15448,7 @@
 </p:sld>
 </file>
 
-<file path=ppt/slides/slide27.xml><?xml version="1.0" encoding="utf-8"?>
+<file path=ppt/slides/slide29.xml><?xml version="1.0" encoding="utf-8"?>
 <p:sld xmlns:a="http://schemas.openxmlformats.org/drawingml/2006/main" xmlns:r="http://schemas.openxmlformats.org/officeDocument/2006/relationships" xmlns:p="http://schemas.openxmlformats.org/presentationml/2006/main">
   <p:cSld>
     <p:bg>
@@ -15014,7 +15786,636 @@
 </p:sld>
 </file>
 
-<file path=ppt/slides/slide28.xml><?xml version="1.0" encoding="utf-8"?>
+<file path=ppt/slides/slide3.xml><?xml version="1.0" encoding="utf-8"?>
+<p:sld xmlns:a="http://schemas.openxmlformats.org/drawingml/2006/main" xmlns:r="http://schemas.openxmlformats.org/officeDocument/2006/relationships" xmlns:p="http://schemas.openxmlformats.org/presentationml/2006/main">
+  <p:cSld>
+    <p:bg>
+      <p:bgPr>
+        <a:solidFill>
+          <a:schemeClr val="bg1"/>
+        </a:solidFill>
+        <a:effectLst/>
+      </p:bgPr>
+    </p:bg>
+    <p:spTree>
+      <p:nvGrpSpPr>
+        <p:cNvPr id="1" name="">
+          <a:extLst>
+            <a:ext uri="{FF2B5EF4-FFF2-40B4-BE49-F238E27FC236}">
+              <a16:creationId xmlns:a16="http://schemas.microsoft.com/office/drawing/2014/main" id="{A0DC4AA3-0022-BA0D-9E7D-66B13B5B9A75}"/>
+            </a:ext>
+          </a:extLst>
+        </p:cNvPr>
+        <p:cNvGrpSpPr/>
+        <p:nvPr/>
+      </p:nvGrpSpPr>
+      <p:grpSpPr>
+        <a:xfrm>
+          <a:off x="0" y="0"/>
+          <a:ext cx="0" cy="0"/>
+          <a:chOff x="0" y="0"/>
+          <a:chExt cx="0" cy="0"/>
+        </a:xfrm>
+      </p:grpSpPr>
+      <p:sp>
+        <p:nvSpPr>
+          <p:cNvPr id="2" name="Rectangle 1">
+            <a:extLst>
+              <a:ext uri="{FF2B5EF4-FFF2-40B4-BE49-F238E27FC236}">
+                <a16:creationId xmlns:a16="http://schemas.microsoft.com/office/drawing/2014/main" id="{BB713812-7693-7A33-F95C-E7CBF82C0AC7}"/>
+              </a:ext>
+            </a:extLst>
+          </p:cNvPr>
+          <p:cNvSpPr/>
+          <p:nvPr/>
+        </p:nvSpPr>
+        <p:spPr>
+          <a:xfrm>
+            <a:off x="-795" y="25399"/>
+            <a:ext cx="10285413" cy="9144000"/>
+          </a:xfrm>
+          <a:prstGeom prst="rect">
+            <a:avLst/>
+          </a:prstGeom>
+          <a:gradFill flip="none" rotWithShape="1">
+            <a:gsLst>
+              <a:gs pos="0">
+                <a:srgbClr val="FF0000">
+                  <a:tint val="66000"/>
+                  <a:satMod val="160000"/>
+                </a:srgbClr>
+              </a:gs>
+              <a:gs pos="50000">
+                <a:srgbClr val="FF0000">
+                  <a:tint val="44500"/>
+                  <a:satMod val="160000"/>
+                </a:srgbClr>
+              </a:gs>
+              <a:gs pos="100000">
+                <a:srgbClr val="FF0000">
+                  <a:tint val="23500"/>
+                  <a:satMod val="160000"/>
+                </a:srgbClr>
+              </a:gs>
+            </a:gsLst>
+            <a:lin ang="13500000" scaled="1"/>
+            <a:tileRect/>
+          </a:gradFill>
+          <a:ln w="31750">
+            <a:solidFill>
+              <a:schemeClr val="accent1">
+                <a:shade val="15000"/>
+              </a:schemeClr>
+            </a:solidFill>
+          </a:ln>
+        </p:spPr>
+        <p:style>
+          <a:lnRef idx="2">
+            <a:schemeClr val="accent1">
+              <a:shade val="15000"/>
+            </a:schemeClr>
+          </a:lnRef>
+          <a:fillRef idx="1">
+            <a:schemeClr val="accent1"/>
+          </a:fillRef>
+          <a:effectRef idx="0">
+            <a:schemeClr val="accent1"/>
+          </a:effectRef>
+          <a:fontRef idx="minor">
+            <a:schemeClr val="lt1"/>
+          </a:fontRef>
+        </p:style>
+        <p:txBody>
+          <a:bodyPr rtlCol="0" anchor="ctr"/>
+          <a:lstStyle/>
+          <a:p>
+            <a:pPr marL="0" algn="ctr" defTabSz="457200" rtl="1" eaLnBrk="1" latinLnBrk="0" hangingPunct="1"/>
+            <a:endParaRPr lang="en-DE" dirty="0">
+              <a:latin typeface="Patrick Hand" pitchFamily="2" charset="77"/>
+            </a:endParaRPr>
+          </a:p>
+        </p:txBody>
+      </p:sp>
+      <p:sp>
+        <p:nvSpPr>
+          <p:cNvPr id="5" name="Rectangle 4">
+            <a:extLst>
+              <a:ext uri="{FF2B5EF4-FFF2-40B4-BE49-F238E27FC236}">
+                <a16:creationId xmlns:a16="http://schemas.microsoft.com/office/drawing/2014/main" id="{389978CD-953A-DE5A-0C5E-B22506EFEBA5}"/>
+              </a:ext>
+            </a:extLst>
+          </p:cNvPr>
+          <p:cNvSpPr/>
+          <p:nvPr/>
+        </p:nvSpPr>
+        <p:spPr>
+          <a:xfrm>
+            <a:off x="-794" y="9144000"/>
+            <a:ext cx="10285413" cy="9144000"/>
+          </a:xfrm>
+          <a:prstGeom prst="rect">
+            <a:avLst/>
+          </a:prstGeom>
+          <a:gradFill flip="none" rotWithShape="1">
+            <a:gsLst>
+              <a:gs pos="0">
+                <a:schemeClr val="accent6">
+                  <a:tint val="66000"/>
+                  <a:satMod val="160000"/>
+                </a:schemeClr>
+              </a:gs>
+              <a:gs pos="50000">
+                <a:schemeClr val="accent6">
+                  <a:tint val="44500"/>
+                  <a:satMod val="160000"/>
+                </a:schemeClr>
+              </a:gs>
+              <a:gs pos="100000">
+                <a:schemeClr val="accent6">
+                  <a:tint val="23500"/>
+                  <a:satMod val="160000"/>
+                </a:schemeClr>
+              </a:gs>
+            </a:gsLst>
+            <a:lin ang="13500000" scaled="1"/>
+            <a:tileRect/>
+          </a:gradFill>
+          <a:ln w="31750">
+            <a:solidFill>
+              <a:schemeClr val="accent1">
+                <a:shade val="15000"/>
+              </a:schemeClr>
+            </a:solidFill>
+          </a:ln>
+        </p:spPr>
+        <p:style>
+          <a:lnRef idx="2">
+            <a:schemeClr val="accent1">
+              <a:shade val="15000"/>
+            </a:schemeClr>
+          </a:lnRef>
+          <a:fillRef idx="1">
+            <a:schemeClr val="accent1"/>
+          </a:fillRef>
+          <a:effectRef idx="0">
+            <a:schemeClr val="accent1"/>
+          </a:effectRef>
+          <a:fontRef idx="minor">
+            <a:schemeClr val="lt1"/>
+          </a:fontRef>
+        </p:style>
+        <p:txBody>
+          <a:bodyPr rtlCol="0" anchor="ctr"/>
+          <a:lstStyle/>
+          <a:p>
+            <a:pPr marL="0" algn="ctr" defTabSz="457200" rtl="1" eaLnBrk="1" latinLnBrk="0" hangingPunct="1"/>
+            <a:endParaRPr lang="en-DE" dirty="0">
+              <a:latin typeface="Patrick Hand" pitchFamily="2" charset="77"/>
+            </a:endParaRPr>
+          </a:p>
+        </p:txBody>
+      </p:sp>
+      <p:pic>
+        <p:nvPicPr>
+          <p:cNvPr id="6" name="Picture 5">
+            <a:extLst>
+              <a:ext uri="{FF2B5EF4-FFF2-40B4-BE49-F238E27FC236}">
+                <a16:creationId xmlns:a16="http://schemas.microsoft.com/office/drawing/2014/main" id="{E9CF1C6B-B5DF-DB15-335C-9EF9D02E2644}"/>
+              </a:ext>
+            </a:extLst>
+          </p:cNvPr>
+          <p:cNvPicPr>
+            <a:picLocks noChangeAspect="1"/>
+          </p:cNvPicPr>
+          <p:nvPr/>
+        </p:nvPicPr>
+        <p:blipFill rotWithShape="1">
+          <a:blip r:embed="rId3"/>
+          <a:srcRect l="21500" t="36257" r="12564" b="17086"/>
+          <a:stretch>
+            <a:fillRect/>
+          </a:stretch>
+        </p:blipFill>
+        <p:spPr>
+          <a:xfrm>
+            <a:off x="9333" y="2819400"/>
+            <a:ext cx="10315977" cy="5486400"/>
+          </a:xfrm>
+          <a:prstGeom prst="rect">
+            <a:avLst/>
+          </a:prstGeom>
+        </p:spPr>
+      </p:pic>
+      <p:pic>
+        <p:nvPicPr>
+          <p:cNvPr id="7" name="Picture 6">
+            <a:extLst>
+              <a:ext uri="{FF2B5EF4-FFF2-40B4-BE49-F238E27FC236}">
+                <a16:creationId xmlns:a16="http://schemas.microsoft.com/office/drawing/2014/main" id="{F75C1FB9-F7E4-D807-6D39-929DB29A7EFE}"/>
+              </a:ext>
+            </a:extLst>
+          </p:cNvPr>
+          <p:cNvPicPr>
+            <a:picLocks noChangeAspect="1"/>
+          </p:cNvPicPr>
+          <p:nvPr/>
+        </p:nvPicPr>
+        <p:blipFill rotWithShape="1">
+          <a:blip r:embed="rId4"/>
+          <a:srcRect l="15971" t="42773" r="9579" b="22419"/>
+          <a:stretch>
+            <a:fillRect/>
+          </a:stretch>
+        </p:blipFill>
+        <p:spPr>
+          <a:xfrm>
+            <a:off x="-30564" y="12598400"/>
+            <a:ext cx="10305074" cy="2006600"/>
+          </a:xfrm>
+          <a:prstGeom prst="rect">
+            <a:avLst/>
+          </a:prstGeom>
+        </p:spPr>
+      </p:pic>
+      <p:sp>
+        <p:nvSpPr>
+          <p:cNvPr id="10" name="Rectangle 9">
+            <a:extLst>
+              <a:ext uri="{FF2B5EF4-FFF2-40B4-BE49-F238E27FC236}">
+                <a16:creationId xmlns:a16="http://schemas.microsoft.com/office/drawing/2014/main" id="{F931037C-127C-092B-3046-21C5E1305743}"/>
+              </a:ext>
+            </a:extLst>
+          </p:cNvPr>
+          <p:cNvSpPr/>
+          <p:nvPr/>
+        </p:nvSpPr>
+        <p:spPr>
+          <a:xfrm>
+            <a:off x="1577100" y="981670"/>
+            <a:ext cx="7131212" cy="1323439"/>
+          </a:xfrm>
+          <a:prstGeom prst="rect">
+            <a:avLst/>
+          </a:prstGeom>
+          <a:noFill/>
+          <a:ln>
+            <a:noFill/>
+          </a:ln>
+        </p:spPr>
+        <p:style>
+          <a:lnRef idx="0">
+            <a:scrgbClr r="0" g="0" b="0"/>
+          </a:lnRef>
+          <a:fillRef idx="0">
+            <a:scrgbClr r="0" g="0" b="0"/>
+          </a:fillRef>
+          <a:effectRef idx="0">
+            <a:scrgbClr r="0" g="0" b="0"/>
+          </a:effectRef>
+          <a:fontRef idx="minor">
+            <a:schemeClr val="accent6"/>
+          </a:fontRef>
+        </p:style>
+        <p:txBody>
+          <a:bodyPr wrap="square" lIns="91440" tIns="45720" rIns="91440" bIns="45720">
+            <a:spAutoFit/>
+          </a:bodyPr>
+          <a:lstStyle/>
+          <a:p>
+            <a:pPr algn="ctr"/>
+            <a:r>
+              <a:rPr lang="en-GB" sz="8000" b="1" dirty="0">
+                <a:ln w="6600">
+                  <a:solidFill>
+                    <a:schemeClr val="accent2"/>
+                  </a:solidFill>
+                  <a:prstDash val="solid"/>
+                </a:ln>
+                <a:solidFill>
+                  <a:srgbClr val="FFFFFF"/>
+                </a:solidFill>
+                <a:effectLst>
+                  <a:outerShdw dist="38100" dir="2700000" algn="tl" rotWithShape="0">
+                    <a:schemeClr val="accent2"/>
+                  </a:outerShdw>
+                </a:effectLst>
+                <a:latin typeface="Patrick Hand" pitchFamily="2" charset="77"/>
+              </a:rPr>
+              <a:t>DIRTY CODE</a:t>
+            </a:r>
+          </a:p>
+        </p:txBody>
+      </p:sp>
+      <p:pic>
+        <p:nvPicPr>
+          <p:cNvPr id="12" name="Graphic 11" descr="Close with solid fill">
+            <a:extLst>
+              <a:ext uri="{FF2B5EF4-FFF2-40B4-BE49-F238E27FC236}">
+                <a16:creationId xmlns:a16="http://schemas.microsoft.com/office/drawing/2014/main" id="{28F1D416-1464-F569-BAAC-4CE3AC639CD1}"/>
+              </a:ext>
+            </a:extLst>
+          </p:cNvPr>
+          <p:cNvPicPr>
+            <a:picLocks noChangeAspect="1"/>
+          </p:cNvPicPr>
+          <p:nvPr/>
+        </p:nvPicPr>
+        <p:blipFill>
+          <a:blip r:embed="rId5">
+            <a:extLst>
+              <a:ext uri="{96DAC541-7B7A-43D3-8B79-37D633B846F1}">
+                <asvg:svgBlip xmlns:asvg="http://schemas.microsoft.com/office/drawing/2016/SVG/main" r:embed="rId6"/>
+              </a:ext>
+            </a:extLst>
+          </a:blip>
+          <a:stretch>
+            <a:fillRect/>
+          </a:stretch>
+        </p:blipFill>
+        <p:spPr>
+          <a:xfrm>
+            <a:off x="7678818" y="1219200"/>
+            <a:ext cx="914400" cy="914400"/>
+          </a:xfrm>
+          <a:prstGeom prst="rect">
+            <a:avLst/>
+          </a:prstGeom>
+        </p:spPr>
+      </p:pic>
+      <p:pic>
+        <p:nvPicPr>
+          <p:cNvPr id="14" name="Graphic 13" descr="Tick with solid fill">
+            <a:extLst>
+              <a:ext uri="{FF2B5EF4-FFF2-40B4-BE49-F238E27FC236}">
+                <a16:creationId xmlns:a16="http://schemas.microsoft.com/office/drawing/2014/main" id="{F2663517-508C-9559-F50A-E9F1B59AB837}"/>
+              </a:ext>
+            </a:extLst>
+          </p:cNvPr>
+          <p:cNvPicPr>
+            <a:picLocks noChangeAspect="1"/>
+          </p:cNvPicPr>
+          <p:nvPr/>
+        </p:nvPicPr>
+        <p:blipFill>
+          <a:blip r:embed="rId7">
+            <a:extLst>
+              <a:ext uri="{96DAC541-7B7A-43D3-8B79-37D633B846F1}">
+                <asvg:svgBlip xmlns:asvg="http://schemas.microsoft.com/office/drawing/2016/SVG/main" r:embed="rId8"/>
+              </a:ext>
+            </a:extLst>
+          </a:blip>
+          <a:stretch>
+            <a:fillRect/>
+          </a:stretch>
+        </p:blipFill>
+        <p:spPr>
+          <a:xfrm>
+            <a:off x="7793912" y="10998200"/>
+            <a:ext cx="914400" cy="914400"/>
+          </a:xfrm>
+          <a:prstGeom prst="rect">
+            <a:avLst/>
+          </a:prstGeom>
+        </p:spPr>
+      </p:pic>
+      <p:sp>
+        <p:nvSpPr>
+          <p:cNvPr id="15" name="Rectangle 14">
+            <a:extLst>
+              <a:ext uri="{FF2B5EF4-FFF2-40B4-BE49-F238E27FC236}">
+                <a16:creationId xmlns:a16="http://schemas.microsoft.com/office/drawing/2014/main" id="{3C884966-F1E0-E28C-8306-94E3476AE9EB}"/>
+              </a:ext>
+            </a:extLst>
+          </p:cNvPr>
+          <p:cNvSpPr/>
+          <p:nvPr/>
+        </p:nvSpPr>
+        <p:spPr>
+          <a:xfrm>
+            <a:off x="1462006" y="10805060"/>
+            <a:ext cx="7131212" cy="1323439"/>
+          </a:xfrm>
+          <a:prstGeom prst="rect">
+            <a:avLst/>
+          </a:prstGeom>
+          <a:noFill/>
+          <a:ln>
+            <a:noFill/>
+          </a:ln>
+        </p:spPr>
+        <p:style>
+          <a:lnRef idx="0">
+            <a:scrgbClr r="0" g="0" b="0"/>
+          </a:lnRef>
+          <a:fillRef idx="0">
+            <a:scrgbClr r="0" g="0" b="0"/>
+          </a:fillRef>
+          <a:effectRef idx="0">
+            <a:scrgbClr r="0" g="0" b="0"/>
+          </a:effectRef>
+          <a:fontRef idx="minor">
+            <a:schemeClr val="accent6"/>
+          </a:fontRef>
+        </p:style>
+        <p:txBody>
+          <a:bodyPr wrap="square" lIns="91440" tIns="45720" rIns="91440" bIns="45720">
+            <a:spAutoFit/>
+          </a:bodyPr>
+          <a:lstStyle/>
+          <a:p>
+            <a:pPr algn="ctr"/>
+            <a:r>
+              <a:rPr lang="en-GB" sz="8000" b="1" dirty="0">
+                <a:ln w="12700">
+                  <a:solidFill>
+                    <a:srgbClr val="00B050"/>
+                  </a:solidFill>
+                  <a:prstDash val="solid"/>
+                </a:ln>
+                <a:pattFill prst="pct50">
+                  <a:fgClr>
+                    <a:schemeClr val="accent1"/>
+                  </a:fgClr>
+                  <a:bgClr>
+                    <a:schemeClr val="accent1">
+                      <a:lumMod val="20000"/>
+                      <a:lumOff val="80000"/>
+                    </a:schemeClr>
+                  </a:bgClr>
+                </a:pattFill>
+                <a:effectLst>
+                  <a:outerShdw dist="38100" dir="2640000" algn="bl" rotWithShape="0">
+                    <a:schemeClr val="accent1"/>
+                  </a:outerShdw>
+                </a:effectLst>
+                <a:latin typeface="Patrick Hand" pitchFamily="2" charset="77"/>
+              </a:rPr>
+              <a:t>CLEAN CODE</a:t>
+            </a:r>
+          </a:p>
+        </p:txBody>
+      </p:sp>
+      <p:sp>
+        <p:nvSpPr>
+          <p:cNvPr id="18" name="Down Arrow 17">
+            <a:extLst>
+              <a:ext uri="{FF2B5EF4-FFF2-40B4-BE49-F238E27FC236}">
+                <a16:creationId xmlns:a16="http://schemas.microsoft.com/office/drawing/2014/main" id="{F519B709-69F6-84B3-4A2B-206F2AAA7983}"/>
+              </a:ext>
+            </a:extLst>
+          </p:cNvPr>
+          <p:cNvSpPr/>
+          <p:nvPr/>
+        </p:nvSpPr>
+        <p:spPr>
+          <a:xfrm>
+            <a:off x="3683000" y="8610600"/>
+            <a:ext cx="2921000" cy="2194460"/>
+          </a:xfrm>
+          <a:prstGeom prst="downArrow">
+            <a:avLst/>
+          </a:prstGeom>
+          <a:solidFill>
+            <a:schemeClr val="bg1"/>
+          </a:solidFill>
+          <a:ln w="31750">
+            <a:solidFill>
+              <a:schemeClr val="accent1">
+                <a:shade val="15000"/>
+              </a:schemeClr>
+            </a:solidFill>
+          </a:ln>
+        </p:spPr>
+        <p:style>
+          <a:lnRef idx="2">
+            <a:schemeClr val="accent1">
+              <a:shade val="15000"/>
+            </a:schemeClr>
+          </a:lnRef>
+          <a:fillRef idx="1">
+            <a:schemeClr val="accent1"/>
+          </a:fillRef>
+          <a:effectRef idx="0">
+            <a:schemeClr val="accent1"/>
+          </a:effectRef>
+          <a:fontRef idx="minor">
+            <a:schemeClr val="lt1"/>
+          </a:fontRef>
+        </p:style>
+        <p:txBody>
+          <a:bodyPr rtlCol="0" anchor="ctr"/>
+          <a:lstStyle/>
+          <a:p>
+            <a:pPr marL="0" algn="ctr" defTabSz="457200" rtl="0" eaLnBrk="1" latinLnBrk="0" hangingPunct="1"/>
+            <a:endParaRPr lang="en-DE" dirty="0">
+              <a:latin typeface="Patrick Hand" pitchFamily="2" charset="77"/>
+            </a:endParaRPr>
+          </a:p>
+        </p:txBody>
+      </p:sp>
+      <p:sp>
+        <p:nvSpPr>
+          <p:cNvPr id="3" name="Rectangle 2">
+            <a:extLst>
+              <a:ext uri="{FF2B5EF4-FFF2-40B4-BE49-F238E27FC236}">
+                <a16:creationId xmlns:a16="http://schemas.microsoft.com/office/drawing/2014/main" id="{0A3573D3-02FD-8867-C498-4782AE7F0917}"/>
+              </a:ext>
+            </a:extLst>
+          </p:cNvPr>
+          <p:cNvSpPr/>
+          <p:nvPr/>
+        </p:nvSpPr>
+        <p:spPr>
+          <a:xfrm>
+            <a:off x="-8208470" y="2819400"/>
+            <a:ext cx="7768473" cy="923330"/>
+          </a:xfrm>
+          <a:prstGeom prst="rect">
+            <a:avLst/>
+          </a:prstGeom>
+          <a:ln>
+            <a:solidFill>
+              <a:schemeClr val="tx1"/>
+            </a:solidFill>
+          </a:ln>
+        </p:spPr>
+        <p:style>
+          <a:lnRef idx="1">
+            <a:schemeClr val="accent6"/>
+          </a:lnRef>
+          <a:fillRef idx="2">
+            <a:schemeClr val="accent6"/>
+          </a:fillRef>
+          <a:effectRef idx="1">
+            <a:schemeClr val="accent6"/>
+          </a:effectRef>
+          <a:fontRef idx="minor">
+            <a:schemeClr val="dk1"/>
+          </a:fontRef>
+        </p:style>
+        <p:txBody>
+          <a:bodyPr wrap="none" lIns="91440" tIns="45720" rIns="91440" bIns="45720">
+            <a:spAutoFit/>
+            <a:scene3d>
+              <a:camera prst="orthographicFront"/>
+              <a:lightRig rig="soft" dir="t">
+                <a:rot lat="0" lon="0" rev="15600000"/>
+              </a:lightRig>
+            </a:scene3d>
+            <a:sp3d extrusionH="57150" prstMaterial="softEdge">
+              <a:bevelT w="25400" h="38100"/>
+            </a:sp3d>
+          </a:bodyPr>
+          <a:lstStyle/>
+          <a:p>
+            <a:pPr algn="ctr"/>
+            <a:r>
+              <a:rPr lang="en-GB" sz="5400" dirty="0">
+                <a:ln w="0"/>
+                <a:solidFill>
+                  <a:schemeClr val="tx1"/>
+                </a:solidFill>
+                <a:effectLst>
+                  <a:outerShdw blurRad="38100" dist="19050" dir="2700000" algn="tl" rotWithShape="0">
+                    <a:schemeClr val="dk1">
+                      <a:alpha val="40000"/>
+                    </a:schemeClr>
+                  </a:outerShdw>
+                </a:effectLst>
+                <a:latin typeface="Patrick Hand" pitchFamily="2" charset="77"/>
+              </a:rPr>
+              <a:t>py_002_list_comprehensions</a:t>
+            </a:r>
+            <a:endParaRPr lang="en-DE" sz="5400" dirty="0">
+              <a:ln w="0"/>
+              <a:solidFill>
+                <a:schemeClr val="tx1"/>
+              </a:solidFill>
+              <a:effectLst>
+                <a:outerShdw blurRad="38100" dist="19050" dir="2700000" algn="tl" rotWithShape="0">
+                  <a:schemeClr val="dk1">
+                    <a:alpha val="40000"/>
+                  </a:schemeClr>
+                </a:outerShdw>
+              </a:effectLst>
+            </a:endParaRPr>
+          </a:p>
+        </p:txBody>
+      </p:sp>
+    </p:spTree>
+    <p:extLst>
+      <p:ext uri="{BB962C8B-B14F-4D97-AF65-F5344CB8AC3E}">
+        <p14:creationId xmlns:p14="http://schemas.microsoft.com/office/powerpoint/2010/main" val="1367177939"/>
+      </p:ext>
+    </p:extLst>
+  </p:cSld>
+  <p:clrMapOvr>
+    <a:masterClrMapping/>
+  </p:clrMapOvr>
+</p:sld>
+</file>
+
+<file path=ppt/slides/slide30.xml><?xml version="1.0" encoding="utf-8"?>
 <p:sld xmlns:a="http://schemas.openxmlformats.org/drawingml/2006/main" xmlns:r="http://schemas.openxmlformats.org/officeDocument/2006/relationships" xmlns:p="http://schemas.openxmlformats.org/presentationml/2006/main">
   <p:cSld>
     <p:bg>
@@ -15394,7 +16795,7 @@
 </p:sld>
 </file>
 
-<file path=ppt/slides/slide29.xml><?xml version="1.0" encoding="utf-8"?>
+<file path=ppt/slides/slide31.xml><?xml version="1.0" encoding="utf-8"?>
 <p:sld xmlns:a="http://schemas.openxmlformats.org/drawingml/2006/main" xmlns:r="http://schemas.openxmlformats.org/officeDocument/2006/relationships" xmlns:p="http://schemas.openxmlformats.org/presentationml/2006/main">
   <p:cSld>
     <p:bg>
@@ -15726,636 +17127,7 @@
 </p:sld>
 </file>
 
-<file path=ppt/slides/slide3.xml><?xml version="1.0" encoding="utf-8"?>
-<p:sld xmlns:a="http://schemas.openxmlformats.org/drawingml/2006/main" xmlns:r="http://schemas.openxmlformats.org/officeDocument/2006/relationships" xmlns:p="http://schemas.openxmlformats.org/presentationml/2006/main">
-  <p:cSld>
-    <p:bg>
-      <p:bgPr>
-        <a:solidFill>
-          <a:schemeClr val="bg1"/>
-        </a:solidFill>
-        <a:effectLst/>
-      </p:bgPr>
-    </p:bg>
-    <p:spTree>
-      <p:nvGrpSpPr>
-        <p:cNvPr id="1" name="">
-          <a:extLst>
-            <a:ext uri="{FF2B5EF4-FFF2-40B4-BE49-F238E27FC236}">
-              <a16:creationId xmlns:a16="http://schemas.microsoft.com/office/drawing/2014/main" id="{A0DC4AA3-0022-BA0D-9E7D-66B13B5B9A75}"/>
-            </a:ext>
-          </a:extLst>
-        </p:cNvPr>
-        <p:cNvGrpSpPr/>
-        <p:nvPr/>
-      </p:nvGrpSpPr>
-      <p:grpSpPr>
-        <a:xfrm>
-          <a:off x="0" y="0"/>
-          <a:ext cx="0" cy="0"/>
-          <a:chOff x="0" y="0"/>
-          <a:chExt cx="0" cy="0"/>
-        </a:xfrm>
-      </p:grpSpPr>
-      <p:sp>
-        <p:nvSpPr>
-          <p:cNvPr id="2" name="Rectangle 1">
-            <a:extLst>
-              <a:ext uri="{FF2B5EF4-FFF2-40B4-BE49-F238E27FC236}">
-                <a16:creationId xmlns:a16="http://schemas.microsoft.com/office/drawing/2014/main" id="{BB713812-7693-7A33-F95C-E7CBF82C0AC7}"/>
-              </a:ext>
-            </a:extLst>
-          </p:cNvPr>
-          <p:cNvSpPr/>
-          <p:nvPr/>
-        </p:nvSpPr>
-        <p:spPr>
-          <a:xfrm>
-            <a:off x="-795" y="25399"/>
-            <a:ext cx="10285413" cy="9144000"/>
-          </a:xfrm>
-          <a:prstGeom prst="rect">
-            <a:avLst/>
-          </a:prstGeom>
-          <a:gradFill flip="none" rotWithShape="1">
-            <a:gsLst>
-              <a:gs pos="0">
-                <a:srgbClr val="FF0000">
-                  <a:tint val="66000"/>
-                  <a:satMod val="160000"/>
-                </a:srgbClr>
-              </a:gs>
-              <a:gs pos="50000">
-                <a:srgbClr val="FF0000">
-                  <a:tint val="44500"/>
-                  <a:satMod val="160000"/>
-                </a:srgbClr>
-              </a:gs>
-              <a:gs pos="100000">
-                <a:srgbClr val="FF0000">
-                  <a:tint val="23500"/>
-                  <a:satMod val="160000"/>
-                </a:srgbClr>
-              </a:gs>
-            </a:gsLst>
-            <a:lin ang="13500000" scaled="1"/>
-            <a:tileRect/>
-          </a:gradFill>
-          <a:ln w="31750">
-            <a:solidFill>
-              <a:schemeClr val="accent1">
-                <a:shade val="15000"/>
-              </a:schemeClr>
-            </a:solidFill>
-          </a:ln>
-        </p:spPr>
-        <p:style>
-          <a:lnRef idx="2">
-            <a:schemeClr val="accent1">
-              <a:shade val="15000"/>
-            </a:schemeClr>
-          </a:lnRef>
-          <a:fillRef idx="1">
-            <a:schemeClr val="accent1"/>
-          </a:fillRef>
-          <a:effectRef idx="0">
-            <a:schemeClr val="accent1"/>
-          </a:effectRef>
-          <a:fontRef idx="minor">
-            <a:schemeClr val="lt1"/>
-          </a:fontRef>
-        </p:style>
-        <p:txBody>
-          <a:bodyPr rtlCol="0" anchor="ctr"/>
-          <a:lstStyle/>
-          <a:p>
-            <a:pPr marL="0" algn="ctr" defTabSz="457200" rtl="1" eaLnBrk="1" latinLnBrk="0" hangingPunct="1"/>
-            <a:endParaRPr lang="en-DE" dirty="0">
-              <a:latin typeface="Patrick Hand" pitchFamily="2" charset="77"/>
-            </a:endParaRPr>
-          </a:p>
-        </p:txBody>
-      </p:sp>
-      <p:sp>
-        <p:nvSpPr>
-          <p:cNvPr id="5" name="Rectangle 4">
-            <a:extLst>
-              <a:ext uri="{FF2B5EF4-FFF2-40B4-BE49-F238E27FC236}">
-                <a16:creationId xmlns:a16="http://schemas.microsoft.com/office/drawing/2014/main" id="{389978CD-953A-DE5A-0C5E-B22506EFEBA5}"/>
-              </a:ext>
-            </a:extLst>
-          </p:cNvPr>
-          <p:cNvSpPr/>
-          <p:nvPr/>
-        </p:nvSpPr>
-        <p:spPr>
-          <a:xfrm>
-            <a:off x="-794" y="9144000"/>
-            <a:ext cx="10285413" cy="9144000"/>
-          </a:xfrm>
-          <a:prstGeom prst="rect">
-            <a:avLst/>
-          </a:prstGeom>
-          <a:gradFill flip="none" rotWithShape="1">
-            <a:gsLst>
-              <a:gs pos="0">
-                <a:schemeClr val="accent6">
-                  <a:tint val="66000"/>
-                  <a:satMod val="160000"/>
-                </a:schemeClr>
-              </a:gs>
-              <a:gs pos="50000">
-                <a:schemeClr val="accent6">
-                  <a:tint val="44500"/>
-                  <a:satMod val="160000"/>
-                </a:schemeClr>
-              </a:gs>
-              <a:gs pos="100000">
-                <a:schemeClr val="accent6">
-                  <a:tint val="23500"/>
-                  <a:satMod val="160000"/>
-                </a:schemeClr>
-              </a:gs>
-            </a:gsLst>
-            <a:lin ang="13500000" scaled="1"/>
-            <a:tileRect/>
-          </a:gradFill>
-          <a:ln w="31750">
-            <a:solidFill>
-              <a:schemeClr val="accent1">
-                <a:shade val="15000"/>
-              </a:schemeClr>
-            </a:solidFill>
-          </a:ln>
-        </p:spPr>
-        <p:style>
-          <a:lnRef idx="2">
-            <a:schemeClr val="accent1">
-              <a:shade val="15000"/>
-            </a:schemeClr>
-          </a:lnRef>
-          <a:fillRef idx="1">
-            <a:schemeClr val="accent1"/>
-          </a:fillRef>
-          <a:effectRef idx="0">
-            <a:schemeClr val="accent1"/>
-          </a:effectRef>
-          <a:fontRef idx="minor">
-            <a:schemeClr val="lt1"/>
-          </a:fontRef>
-        </p:style>
-        <p:txBody>
-          <a:bodyPr rtlCol="0" anchor="ctr"/>
-          <a:lstStyle/>
-          <a:p>
-            <a:pPr marL="0" algn="ctr" defTabSz="457200" rtl="1" eaLnBrk="1" latinLnBrk="0" hangingPunct="1"/>
-            <a:endParaRPr lang="en-DE" dirty="0">
-              <a:latin typeface="Patrick Hand" pitchFamily="2" charset="77"/>
-            </a:endParaRPr>
-          </a:p>
-        </p:txBody>
-      </p:sp>
-      <p:pic>
-        <p:nvPicPr>
-          <p:cNvPr id="6" name="Picture 5">
-            <a:extLst>
-              <a:ext uri="{FF2B5EF4-FFF2-40B4-BE49-F238E27FC236}">
-                <a16:creationId xmlns:a16="http://schemas.microsoft.com/office/drawing/2014/main" id="{E9CF1C6B-B5DF-DB15-335C-9EF9D02E2644}"/>
-              </a:ext>
-            </a:extLst>
-          </p:cNvPr>
-          <p:cNvPicPr>
-            <a:picLocks noChangeAspect="1"/>
-          </p:cNvPicPr>
-          <p:nvPr/>
-        </p:nvPicPr>
-        <p:blipFill rotWithShape="1">
-          <a:blip r:embed="rId3"/>
-          <a:srcRect l="21500" t="36257" r="12564" b="17086"/>
-          <a:stretch>
-            <a:fillRect/>
-          </a:stretch>
-        </p:blipFill>
-        <p:spPr>
-          <a:xfrm>
-            <a:off x="9333" y="2819400"/>
-            <a:ext cx="10315977" cy="5486400"/>
-          </a:xfrm>
-          <a:prstGeom prst="rect">
-            <a:avLst/>
-          </a:prstGeom>
-        </p:spPr>
-      </p:pic>
-      <p:pic>
-        <p:nvPicPr>
-          <p:cNvPr id="7" name="Picture 6">
-            <a:extLst>
-              <a:ext uri="{FF2B5EF4-FFF2-40B4-BE49-F238E27FC236}">
-                <a16:creationId xmlns:a16="http://schemas.microsoft.com/office/drawing/2014/main" id="{F75C1FB9-F7E4-D807-6D39-929DB29A7EFE}"/>
-              </a:ext>
-            </a:extLst>
-          </p:cNvPr>
-          <p:cNvPicPr>
-            <a:picLocks noChangeAspect="1"/>
-          </p:cNvPicPr>
-          <p:nvPr/>
-        </p:nvPicPr>
-        <p:blipFill rotWithShape="1">
-          <a:blip r:embed="rId4"/>
-          <a:srcRect l="15971" t="42773" r="9579" b="22419"/>
-          <a:stretch>
-            <a:fillRect/>
-          </a:stretch>
-        </p:blipFill>
-        <p:spPr>
-          <a:xfrm>
-            <a:off x="-30564" y="12598400"/>
-            <a:ext cx="10305074" cy="2006600"/>
-          </a:xfrm>
-          <a:prstGeom prst="rect">
-            <a:avLst/>
-          </a:prstGeom>
-        </p:spPr>
-      </p:pic>
-      <p:sp>
-        <p:nvSpPr>
-          <p:cNvPr id="10" name="Rectangle 9">
-            <a:extLst>
-              <a:ext uri="{FF2B5EF4-FFF2-40B4-BE49-F238E27FC236}">
-                <a16:creationId xmlns:a16="http://schemas.microsoft.com/office/drawing/2014/main" id="{F931037C-127C-092B-3046-21C5E1305743}"/>
-              </a:ext>
-            </a:extLst>
-          </p:cNvPr>
-          <p:cNvSpPr/>
-          <p:nvPr/>
-        </p:nvSpPr>
-        <p:spPr>
-          <a:xfrm>
-            <a:off x="1577100" y="981670"/>
-            <a:ext cx="7131212" cy="1323439"/>
-          </a:xfrm>
-          <a:prstGeom prst="rect">
-            <a:avLst/>
-          </a:prstGeom>
-          <a:noFill/>
-          <a:ln>
-            <a:noFill/>
-          </a:ln>
-        </p:spPr>
-        <p:style>
-          <a:lnRef idx="0">
-            <a:scrgbClr r="0" g="0" b="0"/>
-          </a:lnRef>
-          <a:fillRef idx="0">
-            <a:scrgbClr r="0" g="0" b="0"/>
-          </a:fillRef>
-          <a:effectRef idx="0">
-            <a:scrgbClr r="0" g="0" b="0"/>
-          </a:effectRef>
-          <a:fontRef idx="minor">
-            <a:schemeClr val="accent6"/>
-          </a:fontRef>
-        </p:style>
-        <p:txBody>
-          <a:bodyPr wrap="square" lIns="91440" tIns="45720" rIns="91440" bIns="45720">
-            <a:spAutoFit/>
-          </a:bodyPr>
-          <a:lstStyle/>
-          <a:p>
-            <a:pPr algn="ctr"/>
-            <a:r>
-              <a:rPr lang="en-GB" sz="8000" b="1" dirty="0">
-                <a:ln w="6600">
-                  <a:solidFill>
-                    <a:schemeClr val="accent2"/>
-                  </a:solidFill>
-                  <a:prstDash val="solid"/>
-                </a:ln>
-                <a:solidFill>
-                  <a:srgbClr val="FFFFFF"/>
-                </a:solidFill>
-                <a:effectLst>
-                  <a:outerShdw dist="38100" dir="2700000" algn="tl" rotWithShape="0">
-                    <a:schemeClr val="accent2"/>
-                  </a:outerShdw>
-                </a:effectLst>
-                <a:latin typeface="Patrick Hand" pitchFamily="2" charset="77"/>
-              </a:rPr>
-              <a:t>DIRTY CODE</a:t>
-            </a:r>
-          </a:p>
-        </p:txBody>
-      </p:sp>
-      <p:pic>
-        <p:nvPicPr>
-          <p:cNvPr id="12" name="Graphic 11" descr="Close with solid fill">
-            <a:extLst>
-              <a:ext uri="{FF2B5EF4-FFF2-40B4-BE49-F238E27FC236}">
-                <a16:creationId xmlns:a16="http://schemas.microsoft.com/office/drawing/2014/main" id="{28F1D416-1464-F569-BAAC-4CE3AC639CD1}"/>
-              </a:ext>
-            </a:extLst>
-          </p:cNvPr>
-          <p:cNvPicPr>
-            <a:picLocks noChangeAspect="1"/>
-          </p:cNvPicPr>
-          <p:nvPr/>
-        </p:nvPicPr>
-        <p:blipFill>
-          <a:blip r:embed="rId5">
-            <a:extLst>
-              <a:ext uri="{96DAC541-7B7A-43D3-8B79-37D633B846F1}">
-                <asvg:svgBlip xmlns:asvg="http://schemas.microsoft.com/office/drawing/2016/SVG/main" r:embed="rId6"/>
-              </a:ext>
-            </a:extLst>
-          </a:blip>
-          <a:stretch>
-            <a:fillRect/>
-          </a:stretch>
-        </p:blipFill>
-        <p:spPr>
-          <a:xfrm>
-            <a:off x="7678818" y="1219200"/>
-            <a:ext cx="914400" cy="914400"/>
-          </a:xfrm>
-          <a:prstGeom prst="rect">
-            <a:avLst/>
-          </a:prstGeom>
-        </p:spPr>
-      </p:pic>
-      <p:pic>
-        <p:nvPicPr>
-          <p:cNvPr id="14" name="Graphic 13" descr="Tick with solid fill">
-            <a:extLst>
-              <a:ext uri="{FF2B5EF4-FFF2-40B4-BE49-F238E27FC236}">
-                <a16:creationId xmlns:a16="http://schemas.microsoft.com/office/drawing/2014/main" id="{F2663517-508C-9559-F50A-E9F1B59AB837}"/>
-              </a:ext>
-            </a:extLst>
-          </p:cNvPr>
-          <p:cNvPicPr>
-            <a:picLocks noChangeAspect="1"/>
-          </p:cNvPicPr>
-          <p:nvPr/>
-        </p:nvPicPr>
-        <p:blipFill>
-          <a:blip r:embed="rId7">
-            <a:extLst>
-              <a:ext uri="{96DAC541-7B7A-43D3-8B79-37D633B846F1}">
-                <asvg:svgBlip xmlns:asvg="http://schemas.microsoft.com/office/drawing/2016/SVG/main" r:embed="rId8"/>
-              </a:ext>
-            </a:extLst>
-          </a:blip>
-          <a:stretch>
-            <a:fillRect/>
-          </a:stretch>
-        </p:blipFill>
-        <p:spPr>
-          <a:xfrm>
-            <a:off x="7793912" y="10998200"/>
-            <a:ext cx="914400" cy="914400"/>
-          </a:xfrm>
-          <a:prstGeom prst="rect">
-            <a:avLst/>
-          </a:prstGeom>
-        </p:spPr>
-      </p:pic>
-      <p:sp>
-        <p:nvSpPr>
-          <p:cNvPr id="15" name="Rectangle 14">
-            <a:extLst>
-              <a:ext uri="{FF2B5EF4-FFF2-40B4-BE49-F238E27FC236}">
-                <a16:creationId xmlns:a16="http://schemas.microsoft.com/office/drawing/2014/main" id="{3C884966-F1E0-E28C-8306-94E3476AE9EB}"/>
-              </a:ext>
-            </a:extLst>
-          </p:cNvPr>
-          <p:cNvSpPr/>
-          <p:nvPr/>
-        </p:nvSpPr>
-        <p:spPr>
-          <a:xfrm>
-            <a:off x="1462006" y="10805060"/>
-            <a:ext cx="7131212" cy="1323439"/>
-          </a:xfrm>
-          <a:prstGeom prst="rect">
-            <a:avLst/>
-          </a:prstGeom>
-          <a:noFill/>
-          <a:ln>
-            <a:noFill/>
-          </a:ln>
-        </p:spPr>
-        <p:style>
-          <a:lnRef idx="0">
-            <a:scrgbClr r="0" g="0" b="0"/>
-          </a:lnRef>
-          <a:fillRef idx="0">
-            <a:scrgbClr r="0" g="0" b="0"/>
-          </a:fillRef>
-          <a:effectRef idx="0">
-            <a:scrgbClr r="0" g="0" b="0"/>
-          </a:effectRef>
-          <a:fontRef idx="minor">
-            <a:schemeClr val="accent6"/>
-          </a:fontRef>
-        </p:style>
-        <p:txBody>
-          <a:bodyPr wrap="square" lIns="91440" tIns="45720" rIns="91440" bIns="45720">
-            <a:spAutoFit/>
-          </a:bodyPr>
-          <a:lstStyle/>
-          <a:p>
-            <a:pPr algn="ctr"/>
-            <a:r>
-              <a:rPr lang="en-GB" sz="8000" b="1" dirty="0">
-                <a:ln w="12700">
-                  <a:solidFill>
-                    <a:srgbClr val="00B050"/>
-                  </a:solidFill>
-                  <a:prstDash val="solid"/>
-                </a:ln>
-                <a:pattFill prst="pct50">
-                  <a:fgClr>
-                    <a:schemeClr val="accent1"/>
-                  </a:fgClr>
-                  <a:bgClr>
-                    <a:schemeClr val="accent1">
-                      <a:lumMod val="20000"/>
-                      <a:lumOff val="80000"/>
-                    </a:schemeClr>
-                  </a:bgClr>
-                </a:pattFill>
-                <a:effectLst>
-                  <a:outerShdw dist="38100" dir="2640000" algn="bl" rotWithShape="0">
-                    <a:schemeClr val="accent1"/>
-                  </a:outerShdw>
-                </a:effectLst>
-                <a:latin typeface="Patrick Hand" pitchFamily="2" charset="77"/>
-              </a:rPr>
-              <a:t>CLEAN CODE</a:t>
-            </a:r>
-          </a:p>
-        </p:txBody>
-      </p:sp>
-      <p:sp>
-        <p:nvSpPr>
-          <p:cNvPr id="18" name="Down Arrow 17">
-            <a:extLst>
-              <a:ext uri="{FF2B5EF4-FFF2-40B4-BE49-F238E27FC236}">
-                <a16:creationId xmlns:a16="http://schemas.microsoft.com/office/drawing/2014/main" id="{F519B709-69F6-84B3-4A2B-206F2AAA7983}"/>
-              </a:ext>
-            </a:extLst>
-          </p:cNvPr>
-          <p:cNvSpPr/>
-          <p:nvPr/>
-        </p:nvSpPr>
-        <p:spPr>
-          <a:xfrm>
-            <a:off x="3683000" y="8610600"/>
-            <a:ext cx="2921000" cy="2194460"/>
-          </a:xfrm>
-          <a:prstGeom prst="downArrow">
-            <a:avLst/>
-          </a:prstGeom>
-          <a:solidFill>
-            <a:schemeClr val="bg1"/>
-          </a:solidFill>
-          <a:ln w="31750">
-            <a:solidFill>
-              <a:schemeClr val="accent1">
-                <a:shade val="15000"/>
-              </a:schemeClr>
-            </a:solidFill>
-          </a:ln>
-        </p:spPr>
-        <p:style>
-          <a:lnRef idx="2">
-            <a:schemeClr val="accent1">
-              <a:shade val="15000"/>
-            </a:schemeClr>
-          </a:lnRef>
-          <a:fillRef idx="1">
-            <a:schemeClr val="accent1"/>
-          </a:fillRef>
-          <a:effectRef idx="0">
-            <a:schemeClr val="accent1"/>
-          </a:effectRef>
-          <a:fontRef idx="minor">
-            <a:schemeClr val="lt1"/>
-          </a:fontRef>
-        </p:style>
-        <p:txBody>
-          <a:bodyPr rtlCol="0" anchor="ctr"/>
-          <a:lstStyle/>
-          <a:p>
-            <a:pPr marL="0" algn="ctr" defTabSz="457200" rtl="0" eaLnBrk="1" latinLnBrk="0" hangingPunct="1"/>
-            <a:endParaRPr lang="en-DE" dirty="0">
-              <a:latin typeface="Patrick Hand" pitchFamily="2" charset="77"/>
-            </a:endParaRPr>
-          </a:p>
-        </p:txBody>
-      </p:sp>
-      <p:sp>
-        <p:nvSpPr>
-          <p:cNvPr id="3" name="Rectangle 2">
-            <a:extLst>
-              <a:ext uri="{FF2B5EF4-FFF2-40B4-BE49-F238E27FC236}">
-                <a16:creationId xmlns:a16="http://schemas.microsoft.com/office/drawing/2014/main" id="{0A3573D3-02FD-8867-C498-4782AE7F0917}"/>
-              </a:ext>
-            </a:extLst>
-          </p:cNvPr>
-          <p:cNvSpPr/>
-          <p:nvPr/>
-        </p:nvSpPr>
-        <p:spPr>
-          <a:xfrm>
-            <a:off x="-8208470" y="2819400"/>
-            <a:ext cx="7768473" cy="923330"/>
-          </a:xfrm>
-          <a:prstGeom prst="rect">
-            <a:avLst/>
-          </a:prstGeom>
-          <a:ln>
-            <a:solidFill>
-              <a:schemeClr val="tx1"/>
-            </a:solidFill>
-          </a:ln>
-        </p:spPr>
-        <p:style>
-          <a:lnRef idx="1">
-            <a:schemeClr val="accent6"/>
-          </a:lnRef>
-          <a:fillRef idx="2">
-            <a:schemeClr val="accent6"/>
-          </a:fillRef>
-          <a:effectRef idx="1">
-            <a:schemeClr val="accent6"/>
-          </a:effectRef>
-          <a:fontRef idx="minor">
-            <a:schemeClr val="dk1"/>
-          </a:fontRef>
-        </p:style>
-        <p:txBody>
-          <a:bodyPr wrap="none" lIns="91440" tIns="45720" rIns="91440" bIns="45720">
-            <a:spAutoFit/>
-            <a:scene3d>
-              <a:camera prst="orthographicFront"/>
-              <a:lightRig rig="soft" dir="t">
-                <a:rot lat="0" lon="0" rev="15600000"/>
-              </a:lightRig>
-            </a:scene3d>
-            <a:sp3d extrusionH="57150" prstMaterial="softEdge">
-              <a:bevelT w="25400" h="38100"/>
-            </a:sp3d>
-          </a:bodyPr>
-          <a:lstStyle/>
-          <a:p>
-            <a:pPr algn="ctr"/>
-            <a:r>
-              <a:rPr lang="en-GB" sz="5400" dirty="0">
-                <a:ln w="0"/>
-                <a:solidFill>
-                  <a:schemeClr val="tx1"/>
-                </a:solidFill>
-                <a:effectLst>
-                  <a:outerShdw blurRad="38100" dist="19050" dir="2700000" algn="tl" rotWithShape="0">
-                    <a:schemeClr val="dk1">
-                      <a:alpha val="40000"/>
-                    </a:schemeClr>
-                  </a:outerShdw>
-                </a:effectLst>
-                <a:latin typeface="Patrick Hand" pitchFamily="2" charset="77"/>
-              </a:rPr>
-              <a:t>py_002_list_comprehensions</a:t>
-            </a:r>
-            <a:endParaRPr lang="en-DE" sz="5400" dirty="0">
-              <a:ln w="0"/>
-              <a:solidFill>
-                <a:schemeClr val="tx1"/>
-              </a:solidFill>
-              <a:effectLst>
-                <a:outerShdw blurRad="38100" dist="19050" dir="2700000" algn="tl" rotWithShape="0">
-                  <a:schemeClr val="dk1">
-                    <a:alpha val="40000"/>
-                  </a:schemeClr>
-                </a:outerShdw>
-              </a:effectLst>
-            </a:endParaRPr>
-          </a:p>
-        </p:txBody>
-      </p:sp>
-    </p:spTree>
-    <p:extLst>
-      <p:ext uri="{BB962C8B-B14F-4D97-AF65-F5344CB8AC3E}">
-        <p14:creationId xmlns:p14="http://schemas.microsoft.com/office/powerpoint/2010/main" val="1367177939"/>
-      </p:ext>
-    </p:extLst>
-  </p:cSld>
-  <p:clrMapOvr>
-    <a:masterClrMapping/>
-  </p:clrMapOvr>
-</p:sld>
-</file>
-
-<file path=ppt/slides/slide30.xml><?xml version="1.0" encoding="utf-8"?>
+<file path=ppt/slides/slide32.xml><?xml version="1.0" encoding="utf-8"?>
 <p:sld xmlns:a="http://schemas.openxmlformats.org/drawingml/2006/main" xmlns:r="http://schemas.openxmlformats.org/officeDocument/2006/relationships" xmlns:p="http://schemas.openxmlformats.org/presentationml/2006/main">
   <p:cSld>
     <p:bg>
@@ -16732,7 +17504,7 @@
 </p:sld>
 </file>
 
-<file path=ppt/slides/slide31.xml><?xml version="1.0" encoding="utf-8"?>
+<file path=ppt/slides/slide33.xml><?xml version="1.0" encoding="utf-8"?>
 <p:sld xmlns:a="http://schemas.openxmlformats.org/drawingml/2006/main" xmlns:r="http://schemas.openxmlformats.org/officeDocument/2006/relationships" xmlns:p="http://schemas.openxmlformats.org/presentationml/2006/main">
   <p:cSld>
     <p:bg>
@@ -17076,7 +17848,7 @@
 </p:sld>
 </file>
 
-<file path=ppt/slides/slide32.xml><?xml version="1.0" encoding="utf-8"?>
+<file path=ppt/slides/slide34.xml><?xml version="1.0" encoding="utf-8"?>
 <p:sld xmlns:a="http://schemas.openxmlformats.org/drawingml/2006/main" xmlns:r="http://schemas.openxmlformats.org/officeDocument/2006/relationships" xmlns:p="http://schemas.openxmlformats.org/presentationml/2006/main">
   <p:cSld>
     <p:bg>
@@ -17393,7 +18165,7 @@
 </p:sld>
 </file>
 
-<file path=ppt/slides/slide33.xml><?xml version="1.0" encoding="utf-8"?>
+<file path=ppt/slides/slide35.xml><?xml version="1.0" encoding="utf-8"?>
 <p:sld xmlns:a="http://schemas.openxmlformats.org/drawingml/2006/main" xmlns:r="http://schemas.openxmlformats.org/officeDocument/2006/relationships" xmlns:p="http://schemas.openxmlformats.org/presentationml/2006/main">
   <p:cSld>
     <p:bg>
@@ -17706,7 +18478,7 @@
 </p:sld>
 </file>
 
-<file path=ppt/slides/slide34.xml><?xml version="1.0" encoding="utf-8"?>
+<file path=ppt/slides/slide36.xml><?xml version="1.0" encoding="utf-8"?>
 <p:sld xmlns:a="http://schemas.openxmlformats.org/drawingml/2006/main" xmlns:r="http://schemas.openxmlformats.org/officeDocument/2006/relationships" xmlns:p="http://schemas.openxmlformats.org/presentationml/2006/main">
   <p:cSld>
     <p:bg>
@@ -17931,7 +18703,7 @@
 </p:sld>
 </file>
 
-<file path=ppt/slides/slide35.xml><?xml version="1.0" encoding="utf-8"?>
+<file path=ppt/slides/slide37.xml><?xml version="1.0" encoding="utf-8"?>
 <p:sld xmlns:a="http://schemas.openxmlformats.org/drawingml/2006/main" xmlns:r="http://schemas.openxmlformats.org/officeDocument/2006/relationships" xmlns:p="http://schemas.openxmlformats.org/presentationml/2006/main">
   <p:cSld>
     <p:bg>
@@ -18276,7 +19048,7 @@
 </p:sld>
 </file>
 
-<file path=ppt/slides/slide36.xml><?xml version="1.0" encoding="utf-8"?>
+<file path=ppt/slides/slide38.xml><?xml version="1.0" encoding="utf-8"?>
 <p:sld xmlns:a="http://schemas.openxmlformats.org/drawingml/2006/main" xmlns:r="http://schemas.openxmlformats.org/officeDocument/2006/relationships" xmlns:p="http://schemas.openxmlformats.org/presentationml/2006/main">
   <p:cSld>
     <p:spTree>
